--- a/wada-tue-scoping-review/manuscripts/individual_figures/Figure_3.pptx
+++ b/wada-tue-scoping-review/manuscripts/individual_figures/Figure_3.pptx
@@ -3096,7 +3096,7 @@
         </p:nvSpPr>
         <p:spPr>
           <a:xfrm>
-            <a:off x="457200" y="182880"/>
+            <a:off x="457200" y="91440"/>
             <a:ext cx="11247120" cy="548640"/>
           </a:xfrm>
           <a:prstGeom prst="rect">
@@ -3112,36 +3112,962 @@
           <a:p>
             <a:pPr algn="ctr"/>
             <a:r>
-              <a:rPr b="1" sz="2400"/>
-              <a:t>Figure 3</a:t>
-            </a:r>
-          </a:p>
-        </p:txBody>
-      </p:sp>
-      <p:pic>
-        <p:nvPicPr>
-          <p:cNvPr id="3" name="Picture 2" descr="fig2_gap_heatmap.png"/>
-          <p:cNvPicPr>
-            <a:picLocks noChangeAspect="1"/>
-          </p:cNvPicPr>
+              <a:rPr b="1" sz="2000">
+                <a:solidFill>
+                  <a:srgbClr val="1B3A5C"/>
+                </a:solidFill>
+              </a:rPr>
+              <a:t>Figure 3. Clinical-Competition Gap Risk Matrix
+by Disease Area and Assessment Dimension</a:t>
+            </a:r>
+          </a:p>
+        </p:txBody>
+      </p:sp>
+      <p:graphicFrame>
+        <p:nvGraphicFramePr>
+          <p:cNvPr id="3" name="Table 2"/>
+          <p:cNvGraphicFramePr>
+            <a:graphicFrameLocks noGrp="1"/>
+          </p:cNvGraphicFramePr>
           <p:nvPr/>
-        </p:nvPicPr>
-        <p:blipFill>
-          <a:blip r:embed="rId2"/>
-          <a:stretch>
-            <a:fillRect/>
-          </a:stretch>
-        </p:blipFill>
-        <p:spPr>
-          <a:xfrm>
-            <a:off x="2144586" y="914400"/>
-            <a:ext cx="7902522" cy="4572000"/>
-          </a:xfrm>
-          <a:prstGeom prst="rect">
-            <a:avLst/>
-          </a:prstGeom>
-        </p:spPr>
-      </p:pic>
+        </p:nvGraphicFramePr>
+        <p:xfrm>
+          <a:off x="914400" y="1188720"/>
+          <a:ext cx="10332720" cy="4572000"/>
+        </p:xfrm>
+        <a:graphic>
+          <a:graphicData uri="http://schemas.openxmlformats.org/drawingml/2006/table">
+            <a:tbl>
+              <a:tblPr firstRow="1" bandRow="1">
+                <a:tableStyleId>{5C22544A-7EE6-4342-B048-85BDC9FD1C3A}</a:tableStyleId>
+              </a:tblPr>
+              <a:tblGrid>
+                <a:gridCol w="3017520"/>
+                <a:gridCol w="1463040"/>
+                <a:gridCol w="1463040"/>
+                <a:gridCol w="1463040"/>
+                <a:gridCol w="1463040"/>
+                <a:gridCol w="1463040"/>
+              </a:tblGrid>
+              <a:tr h="571500">
+                <a:tc>
+                  <a:txBody>
+                    <a:bodyPr/>
+                    <a:lstStyle/>
+                    <a:p>
+                      <a:pPr algn="ctr"/>
+                      <a:r>
+                        <a:rPr sz="900" b="1"/>
+                        <a:t>Disease Area</a:t>
+                      </a:r>
+                    </a:p>
+                  </a:txBody>
+                  <a:tcPr anchor="ctr">
+                    <a:solidFill>
+                      <a:srgbClr val="E3F2FD"/>
+                    </a:solidFill>
+                  </a:tcPr>
+                </a:tc>
+                <a:tc>
+                  <a:txBody>
+                    <a:bodyPr/>
+                    <a:lstStyle/>
+                    <a:p>
+                      <a:pPr algn="ctr"/>
+                      <a:r>
+                        <a:rPr sz="900" b="1"/>
+                        <a:t>First-line Rx</a:t>
+                      </a:r>
+                    </a:p>
+                    <a:p>
+                      <a:pPr algn="ctr"/>
+                      <a:r>
+                        <a:rPr sz="900" b="1"/>
+                        <a:t>Prohibited</a:t>
+                      </a:r>
+                    </a:p>
+                  </a:txBody>
+                  <a:tcPr anchor="ctr">
+                    <a:solidFill>
+                      <a:srgbClr val="E3F2FD"/>
+                    </a:solidFill>
+                  </a:tcPr>
+                </a:tc>
+                <a:tc>
+                  <a:txBody>
+                    <a:bodyPr/>
+                    <a:lstStyle/>
+                    <a:p>
+                      <a:pPr algn="ctr"/>
+                      <a:r>
+                        <a:rPr sz="900" b="1"/>
+                        <a:t>TUE Process</a:t>
+                      </a:r>
+                    </a:p>
+                    <a:p>
+                      <a:pPr algn="ctr"/>
+                      <a:r>
+                        <a:rPr sz="900" b="1"/>
+                        <a:t>Complexity</a:t>
+                      </a:r>
+                    </a:p>
+                  </a:txBody>
+                  <a:tcPr anchor="ctr">
+                    <a:solidFill>
+                      <a:srgbClr val="E3F2FD"/>
+                    </a:solidFill>
+                  </a:tcPr>
+                </a:tc>
+                <a:tc>
+                  <a:txBody>
+                    <a:bodyPr/>
+                    <a:lstStyle/>
+                    <a:p>
+                      <a:pPr algn="ctr"/>
+                      <a:r>
+                        <a:rPr sz="900" b="1"/>
+                        <a:t>Guideline</a:t>
+                      </a:r>
+                    </a:p>
+                    <a:p>
+                      <a:pPr algn="ctr"/>
+                      <a:r>
+                        <a:rPr sz="900" b="1"/>
+                        <a:t>Update Lag</a:t>
+                      </a:r>
+                    </a:p>
+                  </a:txBody>
+                  <a:tcPr anchor="ctr">
+                    <a:solidFill>
+                      <a:srgbClr val="E3F2FD"/>
+                    </a:solidFill>
+                  </a:tcPr>
+                </a:tc>
+                <a:tc>
+                  <a:txBody>
+                    <a:bodyPr/>
+                    <a:lstStyle/>
+                    <a:p>
+                      <a:pPr algn="ctr"/>
+                      <a:r>
+                        <a:rPr sz="900" b="1"/>
+                        <a:t>Athlete</a:t>
+                      </a:r>
+                    </a:p>
+                    <a:p>
+                      <a:pPr algn="ctr"/>
+                      <a:r>
+                        <a:rPr sz="900" b="1"/>
+                        <a:t>Impact</a:t>
+                      </a:r>
+                    </a:p>
+                  </a:txBody>
+                  <a:tcPr anchor="ctr">
+                    <a:solidFill>
+                      <a:srgbClr val="E3F2FD"/>
+                    </a:solidFill>
+                  </a:tcPr>
+                </a:tc>
+                <a:tc>
+                  <a:txBody>
+                    <a:bodyPr/>
+                    <a:lstStyle/>
+                    <a:p>
+                      <a:pPr algn="ctr"/>
+                      <a:r>
+                        <a:rPr sz="900" b="1"/>
+                        <a:t>Alternative Rx</a:t>
+                      </a:r>
+                    </a:p>
+                    <a:p>
+                      <a:pPr algn="ctr"/>
+                      <a:r>
+                        <a:rPr sz="900" b="1"/>
+                        <a:t>Availability</a:t>
+                      </a:r>
+                    </a:p>
+                  </a:txBody>
+                  <a:tcPr anchor="ctr">
+                    <a:solidFill>
+                      <a:srgbClr val="E3F2FD"/>
+                    </a:solidFill>
+                  </a:tcPr>
+                </a:tc>
+              </a:tr>
+              <a:tr h="571500">
+                <a:tc>
+                  <a:txBody>
+                    <a:bodyPr/>
+                    <a:lstStyle/>
+                    <a:p>
+                      <a:pPr algn="ctr"/>
+                      <a:r>
+                        <a:rPr sz="1000" b="1"/>
+                        <a:t>Asthma (Beta-2 agonists)</a:t>
+                      </a:r>
+                    </a:p>
+                  </a:txBody>
+                  <a:tcPr anchor="ctr">
+                    <a:solidFill>
+                      <a:srgbClr val="F5F5F5"/>
+                    </a:solidFill>
+                  </a:tcPr>
+                </a:tc>
+                <a:tc>
+                  <a:txBody>
+                    <a:bodyPr/>
+                    <a:lstStyle/>
+                    <a:p>
+                      <a:pPr algn="ctr"/>
+                      <a:r>
+                        <a:rPr sz="1000" b="0"/>
+                        <a:t>Med</a:t>
+                      </a:r>
+                    </a:p>
+                  </a:txBody>
+                  <a:tcPr anchor="ctr">
+                    <a:solidFill>
+                      <a:srgbClr val="FFF9C4"/>
+                    </a:solidFill>
+                  </a:tcPr>
+                </a:tc>
+                <a:tc>
+                  <a:txBody>
+                    <a:bodyPr/>
+                    <a:lstStyle/>
+                    <a:p>
+                      <a:pPr algn="ctr"/>
+                      <a:r>
+                        <a:rPr sz="1000" b="0"/>
+                        <a:t>Med</a:t>
+                      </a:r>
+                    </a:p>
+                  </a:txBody>
+                  <a:tcPr anchor="ctr">
+                    <a:solidFill>
+                      <a:srgbClr val="FFF9C4"/>
+                    </a:solidFill>
+                  </a:tcPr>
+                </a:tc>
+                <a:tc>
+                  <a:txBody>
+                    <a:bodyPr/>
+                    <a:lstStyle/>
+                    <a:p>
+                      <a:pPr algn="ctr"/>
+                      <a:r>
+                        <a:rPr sz="1000" b="0"/>
+                        <a:t>Med</a:t>
+                      </a:r>
+                    </a:p>
+                  </a:txBody>
+                  <a:tcPr anchor="ctr">
+                    <a:solidFill>
+                      <a:srgbClr val="FFF9C4"/>
+                    </a:solidFill>
+                  </a:tcPr>
+                </a:tc>
+                <a:tc>
+                  <a:txBody>
+                    <a:bodyPr/>
+                    <a:lstStyle/>
+                    <a:p>
+                      <a:pPr algn="ctr"/>
+                      <a:r>
+                        <a:rPr sz="1000" b="0"/>
+                        <a:t>High</a:t>
+                      </a:r>
+                    </a:p>
+                  </a:txBody>
+                  <a:tcPr anchor="ctr">
+                    <a:solidFill>
+                      <a:srgbClr val="FFE0B2"/>
+                    </a:solidFill>
+                  </a:tcPr>
+                </a:tc>
+                <a:tc>
+                  <a:txBody>
+                    <a:bodyPr/>
+                    <a:lstStyle/>
+                    <a:p>
+                      <a:pPr algn="ctr"/>
+                      <a:r>
+                        <a:rPr sz="1000" b="0"/>
+                        <a:t>V.High</a:t>
+                      </a:r>
+                    </a:p>
+                  </a:txBody>
+                  <a:tcPr anchor="ctr">
+                    <a:solidFill>
+                      <a:srgbClr val="EF5350"/>
+                    </a:solidFill>
+                  </a:tcPr>
+                </a:tc>
+              </a:tr>
+              <a:tr h="571500">
+                <a:tc>
+                  <a:txBody>
+                    <a:bodyPr/>
+                    <a:lstStyle/>
+                    <a:p>
+                      <a:pPr algn="ctr"/>
+                      <a:r>
+                        <a:rPr sz="1000" b="1"/>
+                        <a:t>ADHD (Stimulants)</a:t>
+                      </a:r>
+                    </a:p>
+                  </a:txBody>
+                  <a:tcPr anchor="ctr">
+                    <a:solidFill>
+                      <a:srgbClr val="F5F5F5"/>
+                    </a:solidFill>
+                  </a:tcPr>
+                </a:tc>
+                <a:tc>
+                  <a:txBody>
+                    <a:bodyPr/>
+                    <a:lstStyle/>
+                    <a:p>
+                      <a:pPr algn="ctr"/>
+                      <a:r>
+                        <a:rPr sz="1000" b="0"/>
+                        <a:t>V.High</a:t>
+                      </a:r>
+                    </a:p>
+                  </a:txBody>
+                  <a:tcPr anchor="ctr">
+                    <a:solidFill>
+                      <a:srgbClr val="EF5350"/>
+                    </a:solidFill>
+                  </a:tcPr>
+                </a:tc>
+                <a:tc>
+                  <a:txBody>
+                    <a:bodyPr/>
+                    <a:lstStyle/>
+                    <a:p>
+                      <a:pPr algn="ctr"/>
+                      <a:r>
+                        <a:rPr sz="1000" b="0"/>
+                        <a:t>V.High</a:t>
+                      </a:r>
+                    </a:p>
+                  </a:txBody>
+                  <a:tcPr anchor="ctr">
+                    <a:solidFill>
+                      <a:srgbClr val="EF5350"/>
+                    </a:solidFill>
+                  </a:tcPr>
+                </a:tc>
+                <a:tc>
+                  <a:txBody>
+                    <a:bodyPr/>
+                    <a:lstStyle/>
+                    <a:p>
+                      <a:pPr algn="ctr"/>
+                      <a:r>
+                        <a:rPr sz="1000" b="0"/>
+                        <a:t>Med</a:t>
+                      </a:r>
+                    </a:p>
+                  </a:txBody>
+                  <a:tcPr anchor="ctr">
+                    <a:solidFill>
+                      <a:srgbClr val="FFF9C4"/>
+                    </a:solidFill>
+                  </a:tcPr>
+                </a:tc>
+                <a:tc>
+                  <a:txBody>
+                    <a:bodyPr/>
+                    <a:lstStyle/>
+                    <a:p>
+                      <a:pPr algn="ctr"/>
+                      <a:r>
+                        <a:rPr sz="1000" b="0"/>
+                        <a:t>V.High</a:t>
+                      </a:r>
+                    </a:p>
+                  </a:txBody>
+                  <a:tcPr anchor="ctr">
+                    <a:solidFill>
+                      <a:srgbClr val="EF5350"/>
+                    </a:solidFill>
+                  </a:tcPr>
+                </a:tc>
+                <a:tc>
+                  <a:txBody>
+                    <a:bodyPr/>
+                    <a:lstStyle/>
+                    <a:p>
+                      <a:pPr algn="ctr"/>
+                      <a:r>
+                        <a:rPr sz="1000" b="0"/>
+                        <a:t>Med</a:t>
+                      </a:r>
+                    </a:p>
+                  </a:txBody>
+                  <a:tcPr anchor="ctr">
+                    <a:solidFill>
+                      <a:srgbClr val="FFF9C4"/>
+                    </a:solidFill>
+                  </a:tcPr>
+                </a:tc>
+              </a:tr>
+              <a:tr h="571500">
+                <a:tc>
+                  <a:txBody>
+                    <a:bodyPr/>
+                    <a:lstStyle/>
+                    <a:p>
+                      <a:pPr algn="ctr"/>
+                      <a:r>
+                        <a:rPr sz="1000" b="1"/>
+                        <a:t>Type 2 Diabetes (GLP-1 RAs)</a:t>
+                      </a:r>
+                    </a:p>
+                  </a:txBody>
+                  <a:tcPr anchor="ctr">
+                    <a:solidFill>
+                      <a:srgbClr val="F5F5F5"/>
+                    </a:solidFill>
+                  </a:tcPr>
+                </a:tc>
+                <a:tc>
+                  <a:txBody>
+                    <a:bodyPr/>
+                    <a:lstStyle/>
+                    <a:p>
+                      <a:pPr algn="ctr"/>
+                      <a:r>
+                        <a:rPr sz="1000" b="0"/>
+                        <a:t>Low</a:t>
+                      </a:r>
+                    </a:p>
+                  </a:txBody>
+                  <a:tcPr anchor="ctr">
+                    <a:solidFill>
+                      <a:srgbClr val="C8E6C9"/>
+                    </a:solidFill>
+                  </a:tcPr>
+                </a:tc>
+                <a:tc>
+                  <a:txBody>
+                    <a:bodyPr/>
+                    <a:lstStyle/>
+                    <a:p>
+                      <a:pPr algn="ctr"/>
+                      <a:r>
+                        <a:rPr sz="1000" b="0"/>
+                        <a:t>Med</a:t>
+                      </a:r>
+                    </a:p>
+                  </a:txBody>
+                  <a:tcPr anchor="ctr">
+                    <a:solidFill>
+                      <a:srgbClr val="FFF9C4"/>
+                    </a:solidFill>
+                  </a:tcPr>
+                </a:tc>
+                <a:tc>
+                  <a:txBody>
+                    <a:bodyPr/>
+                    <a:lstStyle/>
+                    <a:p>
+                      <a:pPr algn="ctr"/>
+                      <a:r>
+                        <a:rPr sz="1000" b="0"/>
+                        <a:t>High</a:t>
+                      </a:r>
+                    </a:p>
+                  </a:txBody>
+                  <a:tcPr anchor="ctr">
+                    <a:solidFill>
+                      <a:srgbClr val="FFE0B2"/>
+                    </a:solidFill>
+                  </a:tcPr>
+                </a:tc>
+                <a:tc>
+                  <a:txBody>
+                    <a:bodyPr/>
+                    <a:lstStyle/>
+                    <a:p>
+                      <a:pPr algn="ctr"/>
+                      <a:r>
+                        <a:rPr sz="1000" b="0"/>
+                        <a:t>High</a:t>
+                      </a:r>
+                    </a:p>
+                  </a:txBody>
+                  <a:tcPr anchor="ctr">
+                    <a:solidFill>
+                      <a:srgbClr val="FFE0B2"/>
+                    </a:solidFill>
+                  </a:tcPr>
+                </a:tc>
+                <a:tc>
+                  <a:txBody>
+                    <a:bodyPr/>
+                    <a:lstStyle/>
+                    <a:p>
+                      <a:pPr algn="ctr"/>
+                      <a:r>
+                        <a:rPr sz="1000" b="0"/>
+                        <a:t>High</a:t>
+                      </a:r>
+                    </a:p>
+                  </a:txBody>
+                  <a:tcPr anchor="ctr">
+                    <a:solidFill>
+                      <a:srgbClr val="FFE0B2"/>
+                    </a:solidFill>
+                  </a:tcPr>
+                </a:tc>
+              </a:tr>
+              <a:tr h="571500">
+                <a:tc>
+                  <a:txBody>
+                    <a:bodyPr/>
+                    <a:lstStyle/>
+                    <a:p>
+                      <a:pPr algn="ctr"/>
+                      <a:r>
+                        <a:rPr sz="1000" b="1"/>
+                        <a:t>Male Hypogonadism (Testosterone)</a:t>
+                      </a:r>
+                    </a:p>
+                  </a:txBody>
+                  <a:tcPr anchor="ctr">
+                    <a:solidFill>
+                      <a:srgbClr val="F5F5F5"/>
+                    </a:solidFill>
+                  </a:tcPr>
+                </a:tc>
+                <a:tc>
+                  <a:txBody>
+                    <a:bodyPr/>
+                    <a:lstStyle/>
+                    <a:p>
+                      <a:pPr algn="ctr"/>
+                      <a:r>
+                        <a:rPr sz="1000" b="0"/>
+                        <a:t>V.High</a:t>
+                      </a:r>
+                    </a:p>
+                  </a:txBody>
+                  <a:tcPr anchor="ctr">
+                    <a:solidFill>
+                      <a:srgbClr val="EF5350"/>
+                    </a:solidFill>
+                  </a:tcPr>
+                </a:tc>
+                <a:tc>
+                  <a:txBody>
+                    <a:bodyPr/>
+                    <a:lstStyle/>
+                    <a:p>
+                      <a:pPr algn="ctr"/>
+                      <a:r>
+                        <a:rPr sz="1000" b="0"/>
+                        <a:t>V.High</a:t>
+                      </a:r>
+                    </a:p>
+                  </a:txBody>
+                  <a:tcPr anchor="ctr">
+                    <a:solidFill>
+                      <a:srgbClr val="EF5350"/>
+                    </a:solidFill>
+                  </a:tcPr>
+                </a:tc>
+                <a:tc>
+                  <a:txBody>
+                    <a:bodyPr/>
+                    <a:lstStyle/>
+                    <a:p>
+                      <a:pPr algn="ctr"/>
+                      <a:r>
+                        <a:rPr sz="1000" b="0"/>
+                        <a:t>High</a:t>
+                      </a:r>
+                    </a:p>
+                  </a:txBody>
+                  <a:tcPr anchor="ctr">
+                    <a:solidFill>
+                      <a:srgbClr val="FFE0B2"/>
+                    </a:solidFill>
+                  </a:tcPr>
+                </a:tc>
+                <a:tc>
+                  <a:txBody>
+                    <a:bodyPr/>
+                    <a:lstStyle/>
+                    <a:p>
+                      <a:pPr algn="ctr"/>
+                      <a:r>
+                        <a:rPr sz="1000" b="0"/>
+                        <a:t>V.High</a:t>
+                      </a:r>
+                    </a:p>
+                  </a:txBody>
+                  <a:tcPr anchor="ctr">
+                    <a:solidFill>
+                      <a:srgbClr val="EF5350"/>
+                    </a:solidFill>
+                  </a:tcPr>
+                </a:tc>
+                <a:tc>
+                  <a:txBody>
+                    <a:bodyPr/>
+                    <a:lstStyle/>
+                    <a:p>
+                      <a:pPr algn="ctr"/>
+                      <a:r>
+                        <a:rPr sz="1000" b="0"/>
+                        <a:t>Low</a:t>
+                      </a:r>
+                    </a:p>
+                  </a:txBody>
+                  <a:tcPr anchor="ctr">
+                    <a:solidFill>
+                      <a:srgbClr val="C8E6C9"/>
+                    </a:solidFill>
+                  </a:tcPr>
+                </a:tc>
+              </a:tr>
+              <a:tr h="571500">
+                <a:tc>
+                  <a:txBody>
+                    <a:bodyPr/>
+                    <a:lstStyle/>
+                    <a:p>
+                      <a:pPr algn="ctr"/>
+                      <a:r>
+                        <a:rPr sz="1000" b="1"/>
+                        <a:t>Glucocorticoids (Intra-articular)</a:t>
+                      </a:r>
+                    </a:p>
+                  </a:txBody>
+                  <a:tcPr anchor="ctr">
+                    <a:solidFill>
+                      <a:srgbClr val="F5F5F5"/>
+                    </a:solidFill>
+                  </a:tcPr>
+                </a:tc>
+                <a:tc>
+                  <a:txBody>
+                    <a:bodyPr/>
+                    <a:lstStyle/>
+                    <a:p>
+                      <a:pPr algn="ctr"/>
+                      <a:r>
+                        <a:rPr sz="1000" b="0"/>
+                        <a:t>High</a:t>
+                      </a:r>
+                    </a:p>
+                  </a:txBody>
+                  <a:tcPr anchor="ctr">
+                    <a:solidFill>
+                      <a:srgbClr val="FFE0B2"/>
+                    </a:solidFill>
+                  </a:tcPr>
+                </a:tc>
+                <a:tc>
+                  <a:txBody>
+                    <a:bodyPr/>
+                    <a:lstStyle/>
+                    <a:p>
+                      <a:pPr algn="ctr"/>
+                      <a:r>
+                        <a:rPr sz="1000" b="0"/>
+                        <a:t>Med</a:t>
+                      </a:r>
+                    </a:p>
+                  </a:txBody>
+                  <a:tcPr anchor="ctr">
+                    <a:solidFill>
+                      <a:srgbClr val="FFF9C4"/>
+                    </a:solidFill>
+                  </a:tcPr>
+                </a:tc>
+                <a:tc>
+                  <a:txBody>
+                    <a:bodyPr/>
+                    <a:lstStyle/>
+                    <a:p>
+                      <a:pPr algn="ctr"/>
+                      <a:r>
+                        <a:rPr sz="1000" b="0"/>
+                        <a:t>Med</a:t>
+                      </a:r>
+                    </a:p>
+                  </a:txBody>
+                  <a:tcPr anchor="ctr">
+                    <a:solidFill>
+                      <a:srgbClr val="FFF9C4"/>
+                    </a:solidFill>
+                  </a:tcPr>
+                </a:tc>
+                <a:tc>
+                  <a:txBody>
+                    <a:bodyPr/>
+                    <a:lstStyle/>
+                    <a:p>
+                      <a:pPr algn="ctr"/>
+                      <a:r>
+                        <a:rPr sz="1000" b="0"/>
+                        <a:t>High</a:t>
+                      </a:r>
+                    </a:p>
+                  </a:txBody>
+                  <a:tcPr anchor="ctr">
+                    <a:solidFill>
+                      <a:srgbClr val="FFE0B2"/>
+                    </a:solidFill>
+                  </a:tcPr>
+                </a:tc>
+                <a:tc>
+                  <a:txBody>
+                    <a:bodyPr/>
+                    <a:lstStyle/>
+                    <a:p>
+                      <a:pPr algn="ctr"/>
+                      <a:r>
+                        <a:rPr sz="1000" b="0"/>
+                        <a:t>High</a:t>
+                      </a:r>
+                    </a:p>
+                  </a:txBody>
+                  <a:tcPr anchor="ctr">
+                    <a:solidFill>
+                      <a:srgbClr val="FFE0B2"/>
+                    </a:solidFill>
+                  </a:tcPr>
+                </a:tc>
+              </a:tr>
+              <a:tr h="571500">
+                <a:tc>
+                  <a:txBody>
+                    <a:bodyPr/>
+                    <a:lstStyle/>
+                    <a:p>
+                      <a:pPr algn="ctr"/>
+                      <a:r>
+                        <a:rPr sz="1000" b="1"/>
+                        <a:t>Cardiovascular (Diuretics/BB)</a:t>
+                      </a:r>
+                    </a:p>
+                  </a:txBody>
+                  <a:tcPr anchor="ctr">
+                    <a:solidFill>
+                      <a:srgbClr val="F5F5F5"/>
+                    </a:solidFill>
+                  </a:tcPr>
+                </a:tc>
+                <a:tc>
+                  <a:txBody>
+                    <a:bodyPr/>
+                    <a:lstStyle/>
+                    <a:p>
+                      <a:pPr algn="ctr"/>
+                      <a:r>
+                        <a:rPr sz="1000" b="0"/>
+                        <a:t>High</a:t>
+                      </a:r>
+                    </a:p>
+                  </a:txBody>
+                  <a:tcPr anchor="ctr">
+                    <a:solidFill>
+                      <a:srgbClr val="FFE0B2"/>
+                    </a:solidFill>
+                  </a:tcPr>
+                </a:tc>
+                <a:tc>
+                  <a:txBody>
+                    <a:bodyPr/>
+                    <a:lstStyle/>
+                    <a:p>
+                      <a:pPr algn="ctr"/>
+                      <a:r>
+                        <a:rPr sz="1000" b="0"/>
+                        <a:t>High</a:t>
+                      </a:r>
+                    </a:p>
+                  </a:txBody>
+                  <a:tcPr anchor="ctr">
+                    <a:solidFill>
+                      <a:srgbClr val="FFE0B2"/>
+                    </a:solidFill>
+                  </a:tcPr>
+                </a:tc>
+                <a:tc>
+                  <a:txBody>
+                    <a:bodyPr/>
+                    <a:lstStyle/>
+                    <a:p>
+                      <a:pPr algn="ctr"/>
+                      <a:r>
+                        <a:rPr sz="1000" b="0"/>
+                        <a:t>High</a:t>
+                      </a:r>
+                    </a:p>
+                  </a:txBody>
+                  <a:tcPr anchor="ctr">
+                    <a:solidFill>
+                      <a:srgbClr val="FFE0B2"/>
+                    </a:solidFill>
+                  </a:tcPr>
+                </a:tc>
+                <a:tc>
+                  <a:txBody>
+                    <a:bodyPr/>
+                    <a:lstStyle/>
+                    <a:p>
+                      <a:pPr algn="ctr"/>
+                      <a:r>
+                        <a:rPr sz="1000" b="0"/>
+                        <a:t>High</a:t>
+                      </a:r>
+                    </a:p>
+                  </a:txBody>
+                  <a:tcPr anchor="ctr">
+                    <a:solidFill>
+                      <a:srgbClr val="FFE0B2"/>
+                    </a:solidFill>
+                  </a:tcPr>
+                </a:tc>
+                <a:tc>
+                  <a:txBody>
+                    <a:bodyPr/>
+                    <a:lstStyle/>
+                    <a:p>
+                      <a:pPr algn="ctr"/>
+                      <a:r>
+                        <a:rPr sz="1000" b="0"/>
+                        <a:t>Med</a:t>
+                      </a:r>
+                    </a:p>
+                  </a:txBody>
+                  <a:tcPr anchor="ctr">
+                    <a:solidFill>
+                      <a:srgbClr val="FFF9C4"/>
+                    </a:solidFill>
+                  </a:tcPr>
+                </a:tc>
+              </a:tr>
+              <a:tr h="571500">
+                <a:tc>
+                  <a:txBody>
+                    <a:bodyPr/>
+                    <a:lstStyle/>
+                    <a:p>
+                      <a:pPr algn="ctr"/>
+                      <a:r>
+                        <a:rPr sz="1000" b="1"/>
+                        <a:t>PCOS/Fertility (Letrozole/Clomiphene)</a:t>
+                      </a:r>
+                    </a:p>
+                  </a:txBody>
+                  <a:tcPr anchor="ctr">
+                    <a:solidFill>
+                      <a:srgbClr val="F5F5F5"/>
+                    </a:solidFill>
+                  </a:tcPr>
+                </a:tc>
+                <a:tc>
+                  <a:txBody>
+                    <a:bodyPr/>
+                    <a:lstStyle/>
+                    <a:p>
+                      <a:pPr algn="ctr"/>
+                      <a:r>
+                        <a:rPr sz="1000" b="0"/>
+                        <a:t>V.High</a:t>
+                      </a:r>
+                    </a:p>
+                  </a:txBody>
+                  <a:tcPr anchor="ctr">
+                    <a:solidFill>
+                      <a:srgbClr val="EF5350"/>
+                    </a:solidFill>
+                  </a:tcPr>
+                </a:tc>
+                <a:tc>
+                  <a:txBody>
+                    <a:bodyPr/>
+                    <a:lstStyle/>
+                    <a:p>
+                      <a:pPr algn="ctr"/>
+                      <a:r>
+                        <a:rPr sz="1000" b="0"/>
+                        <a:t>High</a:t>
+                      </a:r>
+                    </a:p>
+                  </a:txBody>
+                  <a:tcPr anchor="ctr">
+                    <a:solidFill>
+                      <a:srgbClr val="FFE0B2"/>
+                    </a:solidFill>
+                  </a:tcPr>
+                </a:tc>
+                <a:tc>
+                  <a:txBody>
+                    <a:bodyPr/>
+                    <a:lstStyle/>
+                    <a:p>
+                      <a:pPr algn="ctr"/>
+                      <a:r>
+                        <a:rPr sz="1000" b="0"/>
+                        <a:t>Med</a:t>
+                      </a:r>
+                    </a:p>
+                  </a:txBody>
+                  <a:tcPr anchor="ctr">
+                    <a:solidFill>
+                      <a:srgbClr val="FFF9C4"/>
+                    </a:solidFill>
+                  </a:tcPr>
+                </a:tc>
+                <a:tc>
+                  <a:txBody>
+                    <a:bodyPr/>
+                    <a:lstStyle/>
+                    <a:p>
+                      <a:pPr algn="ctr"/>
+                      <a:r>
+                        <a:rPr sz="1000" b="0"/>
+                        <a:t>High</a:t>
+                      </a:r>
+                    </a:p>
+                  </a:txBody>
+                  <a:tcPr anchor="ctr">
+                    <a:solidFill>
+                      <a:srgbClr val="FFE0B2"/>
+                    </a:solidFill>
+                  </a:tcPr>
+                </a:tc>
+                <a:tc>
+                  <a:txBody>
+                    <a:bodyPr/>
+                    <a:lstStyle/>
+                    <a:p>
+                      <a:pPr algn="ctr"/>
+                      <a:r>
+                        <a:rPr sz="1000" b="0"/>
+                        <a:t>Low</a:t>
+                      </a:r>
+                    </a:p>
+                  </a:txBody>
+                  <a:tcPr anchor="ctr">
+                    <a:solidFill>
+                      <a:srgbClr val="C8E6C9"/>
+                    </a:solidFill>
+                  </a:tcPr>
+                </a:tc>
+              </a:tr>
+            </a:tbl>
+          </a:graphicData>
+        </a:graphic>
+      </p:graphicFrame>
       <p:sp>
         <p:nvSpPr>
           <p:cNvPr id="4" name="TextBox 3"/>
@@ -3151,7 +4077,7 @@
         <p:spPr>
           <a:xfrm>
             <a:off x="457200" y="5943600"/>
-            <a:ext cx="11247120" cy="731520"/>
+            <a:ext cx="11247120" cy="548640"/>
           </a:xfrm>
           <a:prstGeom prst="rect">
             <a:avLst/>
@@ -3166,8 +4092,13 @@
           <a:p>
             <a:pPr algn="ctr"/>
             <a:r>
-              <a:rPr sz="1400" i="1"/>
-              <a:t>Figure 3. Clinical-competition gap risk matrix by disease area and assessment dimension.</a:t>
+              <a:rPr sz="1200" i="1">
+                <a:solidFill>
+                  <a:srgbClr val="424242"/>
+                </a:solidFill>
+              </a:rPr>
+              <a:t>Figure 3. Clinical-competition gap risk matrix by disease area and assessment dimension.
+Severity: None (0), Low (1), Medium (2), High (3), Very High (4).</a:t>
             </a:r>
           </a:p>
         </p:txBody>

--- a/wada-tue-scoping-review/manuscripts/individual_figures/Figure_3.pptx
+++ b/wada-tue-scoping-review/manuscripts/individual_figures/Figure_3.pptx
@@ -3096,8 +3096,8 @@
         </p:nvSpPr>
         <p:spPr>
           <a:xfrm>
-            <a:off x="457200" y="91440"/>
-            <a:ext cx="11247120" cy="548640"/>
+            <a:off x="457200" y="137160"/>
+            <a:ext cx="11247120" cy="640080"/>
           </a:xfrm>
           <a:prstGeom prst="rect">
             <a:avLst/>
@@ -3112,7 +3112,7 @@
           <a:p>
             <a:pPr algn="ctr"/>
             <a:r>
-              <a:rPr b="1" sz="2000">
+              <a:rPr b="1" sz="1800">
                 <a:solidFill>
                   <a:srgbClr val="1B3A5C"/>
                 </a:solidFill>
@@ -3123,961 +3123,16 @@
           </a:p>
         </p:txBody>
       </p:sp>
-      <p:graphicFrame>
-        <p:nvGraphicFramePr>
-          <p:cNvPr id="3" name="Table 2"/>
-          <p:cNvGraphicFramePr>
-            <a:graphicFrameLocks noGrp="1"/>
-          </p:cNvGraphicFramePr>
-          <p:nvPr/>
-        </p:nvGraphicFramePr>
-        <p:xfrm>
-          <a:off x="914400" y="1188720"/>
-          <a:ext cx="10332720" cy="4572000"/>
-        </p:xfrm>
-        <a:graphic>
-          <a:graphicData uri="http://schemas.openxmlformats.org/drawingml/2006/table">
-            <a:tbl>
-              <a:tblPr firstRow="1" bandRow="1">
-                <a:tableStyleId>{5C22544A-7EE6-4342-B048-85BDC9FD1C3A}</a:tableStyleId>
-              </a:tblPr>
-              <a:tblGrid>
-                <a:gridCol w="3017520"/>
-                <a:gridCol w="1463040"/>
-                <a:gridCol w="1463040"/>
-                <a:gridCol w="1463040"/>
-                <a:gridCol w="1463040"/>
-                <a:gridCol w="1463040"/>
-              </a:tblGrid>
-              <a:tr h="571500">
-                <a:tc>
-                  <a:txBody>
-                    <a:bodyPr/>
-                    <a:lstStyle/>
-                    <a:p>
-                      <a:pPr algn="ctr"/>
-                      <a:r>
-                        <a:rPr sz="900" b="1"/>
-                        <a:t>Disease Area</a:t>
-                      </a:r>
-                    </a:p>
-                  </a:txBody>
-                  <a:tcPr anchor="ctr">
-                    <a:solidFill>
-                      <a:srgbClr val="E3F2FD"/>
-                    </a:solidFill>
-                  </a:tcPr>
-                </a:tc>
-                <a:tc>
-                  <a:txBody>
-                    <a:bodyPr/>
-                    <a:lstStyle/>
-                    <a:p>
-                      <a:pPr algn="ctr"/>
-                      <a:r>
-                        <a:rPr sz="900" b="1"/>
-                        <a:t>First-line Rx</a:t>
-                      </a:r>
-                    </a:p>
-                    <a:p>
-                      <a:pPr algn="ctr"/>
-                      <a:r>
-                        <a:rPr sz="900" b="1"/>
-                        <a:t>Prohibited</a:t>
-                      </a:r>
-                    </a:p>
-                  </a:txBody>
-                  <a:tcPr anchor="ctr">
-                    <a:solidFill>
-                      <a:srgbClr val="E3F2FD"/>
-                    </a:solidFill>
-                  </a:tcPr>
-                </a:tc>
-                <a:tc>
-                  <a:txBody>
-                    <a:bodyPr/>
-                    <a:lstStyle/>
-                    <a:p>
-                      <a:pPr algn="ctr"/>
-                      <a:r>
-                        <a:rPr sz="900" b="1"/>
-                        <a:t>TUE Process</a:t>
-                      </a:r>
-                    </a:p>
-                    <a:p>
-                      <a:pPr algn="ctr"/>
-                      <a:r>
-                        <a:rPr sz="900" b="1"/>
-                        <a:t>Complexity</a:t>
-                      </a:r>
-                    </a:p>
-                  </a:txBody>
-                  <a:tcPr anchor="ctr">
-                    <a:solidFill>
-                      <a:srgbClr val="E3F2FD"/>
-                    </a:solidFill>
-                  </a:tcPr>
-                </a:tc>
-                <a:tc>
-                  <a:txBody>
-                    <a:bodyPr/>
-                    <a:lstStyle/>
-                    <a:p>
-                      <a:pPr algn="ctr"/>
-                      <a:r>
-                        <a:rPr sz="900" b="1"/>
-                        <a:t>Guideline</a:t>
-                      </a:r>
-                    </a:p>
-                    <a:p>
-                      <a:pPr algn="ctr"/>
-                      <a:r>
-                        <a:rPr sz="900" b="1"/>
-                        <a:t>Update Lag</a:t>
-                      </a:r>
-                    </a:p>
-                  </a:txBody>
-                  <a:tcPr anchor="ctr">
-                    <a:solidFill>
-                      <a:srgbClr val="E3F2FD"/>
-                    </a:solidFill>
-                  </a:tcPr>
-                </a:tc>
-                <a:tc>
-                  <a:txBody>
-                    <a:bodyPr/>
-                    <a:lstStyle/>
-                    <a:p>
-                      <a:pPr algn="ctr"/>
-                      <a:r>
-                        <a:rPr sz="900" b="1"/>
-                        <a:t>Athlete</a:t>
-                      </a:r>
-                    </a:p>
-                    <a:p>
-                      <a:pPr algn="ctr"/>
-                      <a:r>
-                        <a:rPr sz="900" b="1"/>
-                        <a:t>Impact</a:t>
-                      </a:r>
-                    </a:p>
-                  </a:txBody>
-                  <a:tcPr anchor="ctr">
-                    <a:solidFill>
-                      <a:srgbClr val="E3F2FD"/>
-                    </a:solidFill>
-                  </a:tcPr>
-                </a:tc>
-                <a:tc>
-                  <a:txBody>
-                    <a:bodyPr/>
-                    <a:lstStyle/>
-                    <a:p>
-                      <a:pPr algn="ctr"/>
-                      <a:r>
-                        <a:rPr sz="900" b="1"/>
-                        <a:t>Alternative Rx</a:t>
-                      </a:r>
-                    </a:p>
-                    <a:p>
-                      <a:pPr algn="ctr"/>
-                      <a:r>
-                        <a:rPr sz="900" b="1"/>
-                        <a:t>Availability</a:t>
-                      </a:r>
-                    </a:p>
-                  </a:txBody>
-                  <a:tcPr anchor="ctr">
-                    <a:solidFill>
-                      <a:srgbClr val="E3F2FD"/>
-                    </a:solidFill>
-                  </a:tcPr>
-                </a:tc>
-              </a:tr>
-              <a:tr h="571500">
-                <a:tc>
-                  <a:txBody>
-                    <a:bodyPr/>
-                    <a:lstStyle/>
-                    <a:p>
-                      <a:pPr algn="ctr"/>
-                      <a:r>
-                        <a:rPr sz="1000" b="1"/>
-                        <a:t>Asthma (Beta-2 agonists)</a:t>
-                      </a:r>
-                    </a:p>
-                  </a:txBody>
-                  <a:tcPr anchor="ctr">
-                    <a:solidFill>
-                      <a:srgbClr val="F5F5F5"/>
-                    </a:solidFill>
-                  </a:tcPr>
-                </a:tc>
-                <a:tc>
-                  <a:txBody>
-                    <a:bodyPr/>
-                    <a:lstStyle/>
-                    <a:p>
-                      <a:pPr algn="ctr"/>
-                      <a:r>
-                        <a:rPr sz="1000" b="0"/>
-                        <a:t>Med</a:t>
-                      </a:r>
-                    </a:p>
-                  </a:txBody>
-                  <a:tcPr anchor="ctr">
-                    <a:solidFill>
-                      <a:srgbClr val="FFF9C4"/>
-                    </a:solidFill>
-                  </a:tcPr>
-                </a:tc>
-                <a:tc>
-                  <a:txBody>
-                    <a:bodyPr/>
-                    <a:lstStyle/>
-                    <a:p>
-                      <a:pPr algn="ctr"/>
-                      <a:r>
-                        <a:rPr sz="1000" b="0"/>
-                        <a:t>Med</a:t>
-                      </a:r>
-                    </a:p>
-                  </a:txBody>
-                  <a:tcPr anchor="ctr">
-                    <a:solidFill>
-                      <a:srgbClr val="FFF9C4"/>
-                    </a:solidFill>
-                  </a:tcPr>
-                </a:tc>
-                <a:tc>
-                  <a:txBody>
-                    <a:bodyPr/>
-                    <a:lstStyle/>
-                    <a:p>
-                      <a:pPr algn="ctr"/>
-                      <a:r>
-                        <a:rPr sz="1000" b="0"/>
-                        <a:t>Med</a:t>
-                      </a:r>
-                    </a:p>
-                  </a:txBody>
-                  <a:tcPr anchor="ctr">
-                    <a:solidFill>
-                      <a:srgbClr val="FFF9C4"/>
-                    </a:solidFill>
-                  </a:tcPr>
-                </a:tc>
-                <a:tc>
-                  <a:txBody>
-                    <a:bodyPr/>
-                    <a:lstStyle/>
-                    <a:p>
-                      <a:pPr algn="ctr"/>
-                      <a:r>
-                        <a:rPr sz="1000" b="0"/>
-                        <a:t>High</a:t>
-                      </a:r>
-                    </a:p>
-                  </a:txBody>
-                  <a:tcPr anchor="ctr">
-                    <a:solidFill>
-                      <a:srgbClr val="FFE0B2"/>
-                    </a:solidFill>
-                  </a:tcPr>
-                </a:tc>
-                <a:tc>
-                  <a:txBody>
-                    <a:bodyPr/>
-                    <a:lstStyle/>
-                    <a:p>
-                      <a:pPr algn="ctr"/>
-                      <a:r>
-                        <a:rPr sz="1000" b="0"/>
-                        <a:t>V.High</a:t>
-                      </a:r>
-                    </a:p>
-                  </a:txBody>
-                  <a:tcPr anchor="ctr">
-                    <a:solidFill>
-                      <a:srgbClr val="EF5350"/>
-                    </a:solidFill>
-                  </a:tcPr>
-                </a:tc>
-              </a:tr>
-              <a:tr h="571500">
-                <a:tc>
-                  <a:txBody>
-                    <a:bodyPr/>
-                    <a:lstStyle/>
-                    <a:p>
-                      <a:pPr algn="ctr"/>
-                      <a:r>
-                        <a:rPr sz="1000" b="1"/>
-                        <a:t>ADHD (Stimulants)</a:t>
-                      </a:r>
-                    </a:p>
-                  </a:txBody>
-                  <a:tcPr anchor="ctr">
-                    <a:solidFill>
-                      <a:srgbClr val="F5F5F5"/>
-                    </a:solidFill>
-                  </a:tcPr>
-                </a:tc>
-                <a:tc>
-                  <a:txBody>
-                    <a:bodyPr/>
-                    <a:lstStyle/>
-                    <a:p>
-                      <a:pPr algn="ctr"/>
-                      <a:r>
-                        <a:rPr sz="1000" b="0"/>
-                        <a:t>V.High</a:t>
-                      </a:r>
-                    </a:p>
-                  </a:txBody>
-                  <a:tcPr anchor="ctr">
-                    <a:solidFill>
-                      <a:srgbClr val="EF5350"/>
-                    </a:solidFill>
-                  </a:tcPr>
-                </a:tc>
-                <a:tc>
-                  <a:txBody>
-                    <a:bodyPr/>
-                    <a:lstStyle/>
-                    <a:p>
-                      <a:pPr algn="ctr"/>
-                      <a:r>
-                        <a:rPr sz="1000" b="0"/>
-                        <a:t>V.High</a:t>
-                      </a:r>
-                    </a:p>
-                  </a:txBody>
-                  <a:tcPr anchor="ctr">
-                    <a:solidFill>
-                      <a:srgbClr val="EF5350"/>
-                    </a:solidFill>
-                  </a:tcPr>
-                </a:tc>
-                <a:tc>
-                  <a:txBody>
-                    <a:bodyPr/>
-                    <a:lstStyle/>
-                    <a:p>
-                      <a:pPr algn="ctr"/>
-                      <a:r>
-                        <a:rPr sz="1000" b="0"/>
-                        <a:t>Med</a:t>
-                      </a:r>
-                    </a:p>
-                  </a:txBody>
-                  <a:tcPr anchor="ctr">
-                    <a:solidFill>
-                      <a:srgbClr val="FFF9C4"/>
-                    </a:solidFill>
-                  </a:tcPr>
-                </a:tc>
-                <a:tc>
-                  <a:txBody>
-                    <a:bodyPr/>
-                    <a:lstStyle/>
-                    <a:p>
-                      <a:pPr algn="ctr"/>
-                      <a:r>
-                        <a:rPr sz="1000" b="0"/>
-                        <a:t>V.High</a:t>
-                      </a:r>
-                    </a:p>
-                  </a:txBody>
-                  <a:tcPr anchor="ctr">
-                    <a:solidFill>
-                      <a:srgbClr val="EF5350"/>
-                    </a:solidFill>
-                  </a:tcPr>
-                </a:tc>
-                <a:tc>
-                  <a:txBody>
-                    <a:bodyPr/>
-                    <a:lstStyle/>
-                    <a:p>
-                      <a:pPr algn="ctr"/>
-                      <a:r>
-                        <a:rPr sz="1000" b="0"/>
-                        <a:t>Med</a:t>
-                      </a:r>
-                    </a:p>
-                  </a:txBody>
-                  <a:tcPr anchor="ctr">
-                    <a:solidFill>
-                      <a:srgbClr val="FFF9C4"/>
-                    </a:solidFill>
-                  </a:tcPr>
-                </a:tc>
-              </a:tr>
-              <a:tr h="571500">
-                <a:tc>
-                  <a:txBody>
-                    <a:bodyPr/>
-                    <a:lstStyle/>
-                    <a:p>
-                      <a:pPr algn="ctr"/>
-                      <a:r>
-                        <a:rPr sz="1000" b="1"/>
-                        <a:t>Type 2 Diabetes (GLP-1 RAs)</a:t>
-                      </a:r>
-                    </a:p>
-                  </a:txBody>
-                  <a:tcPr anchor="ctr">
-                    <a:solidFill>
-                      <a:srgbClr val="F5F5F5"/>
-                    </a:solidFill>
-                  </a:tcPr>
-                </a:tc>
-                <a:tc>
-                  <a:txBody>
-                    <a:bodyPr/>
-                    <a:lstStyle/>
-                    <a:p>
-                      <a:pPr algn="ctr"/>
-                      <a:r>
-                        <a:rPr sz="1000" b="0"/>
-                        <a:t>Low</a:t>
-                      </a:r>
-                    </a:p>
-                  </a:txBody>
-                  <a:tcPr anchor="ctr">
-                    <a:solidFill>
-                      <a:srgbClr val="C8E6C9"/>
-                    </a:solidFill>
-                  </a:tcPr>
-                </a:tc>
-                <a:tc>
-                  <a:txBody>
-                    <a:bodyPr/>
-                    <a:lstStyle/>
-                    <a:p>
-                      <a:pPr algn="ctr"/>
-                      <a:r>
-                        <a:rPr sz="1000" b="0"/>
-                        <a:t>Med</a:t>
-                      </a:r>
-                    </a:p>
-                  </a:txBody>
-                  <a:tcPr anchor="ctr">
-                    <a:solidFill>
-                      <a:srgbClr val="FFF9C4"/>
-                    </a:solidFill>
-                  </a:tcPr>
-                </a:tc>
-                <a:tc>
-                  <a:txBody>
-                    <a:bodyPr/>
-                    <a:lstStyle/>
-                    <a:p>
-                      <a:pPr algn="ctr"/>
-                      <a:r>
-                        <a:rPr sz="1000" b="0"/>
-                        <a:t>High</a:t>
-                      </a:r>
-                    </a:p>
-                  </a:txBody>
-                  <a:tcPr anchor="ctr">
-                    <a:solidFill>
-                      <a:srgbClr val="FFE0B2"/>
-                    </a:solidFill>
-                  </a:tcPr>
-                </a:tc>
-                <a:tc>
-                  <a:txBody>
-                    <a:bodyPr/>
-                    <a:lstStyle/>
-                    <a:p>
-                      <a:pPr algn="ctr"/>
-                      <a:r>
-                        <a:rPr sz="1000" b="0"/>
-                        <a:t>High</a:t>
-                      </a:r>
-                    </a:p>
-                  </a:txBody>
-                  <a:tcPr anchor="ctr">
-                    <a:solidFill>
-                      <a:srgbClr val="FFE0B2"/>
-                    </a:solidFill>
-                  </a:tcPr>
-                </a:tc>
-                <a:tc>
-                  <a:txBody>
-                    <a:bodyPr/>
-                    <a:lstStyle/>
-                    <a:p>
-                      <a:pPr algn="ctr"/>
-                      <a:r>
-                        <a:rPr sz="1000" b="0"/>
-                        <a:t>High</a:t>
-                      </a:r>
-                    </a:p>
-                  </a:txBody>
-                  <a:tcPr anchor="ctr">
-                    <a:solidFill>
-                      <a:srgbClr val="FFE0B2"/>
-                    </a:solidFill>
-                  </a:tcPr>
-                </a:tc>
-              </a:tr>
-              <a:tr h="571500">
-                <a:tc>
-                  <a:txBody>
-                    <a:bodyPr/>
-                    <a:lstStyle/>
-                    <a:p>
-                      <a:pPr algn="ctr"/>
-                      <a:r>
-                        <a:rPr sz="1000" b="1"/>
-                        <a:t>Male Hypogonadism (Testosterone)</a:t>
-                      </a:r>
-                    </a:p>
-                  </a:txBody>
-                  <a:tcPr anchor="ctr">
-                    <a:solidFill>
-                      <a:srgbClr val="F5F5F5"/>
-                    </a:solidFill>
-                  </a:tcPr>
-                </a:tc>
-                <a:tc>
-                  <a:txBody>
-                    <a:bodyPr/>
-                    <a:lstStyle/>
-                    <a:p>
-                      <a:pPr algn="ctr"/>
-                      <a:r>
-                        <a:rPr sz="1000" b="0"/>
-                        <a:t>V.High</a:t>
-                      </a:r>
-                    </a:p>
-                  </a:txBody>
-                  <a:tcPr anchor="ctr">
-                    <a:solidFill>
-                      <a:srgbClr val="EF5350"/>
-                    </a:solidFill>
-                  </a:tcPr>
-                </a:tc>
-                <a:tc>
-                  <a:txBody>
-                    <a:bodyPr/>
-                    <a:lstStyle/>
-                    <a:p>
-                      <a:pPr algn="ctr"/>
-                      <a:r>
-                        <a:rPr sz="1000" b="0"/>
-                        <a:t>V.High</a:t>
-                      </a:r>
-                    </a:p>
-                  </a:txBody>
-                  <a:tcPr anchor="ctr">
-                    <a:solidFill>
-                      <a:srgbClr val="EF5350"/>
-                    </a:solidFill>
-                  </a:tcPr>
-                </a:tc>
-                <a:tc>
-                  <a:txBody>
-                    <a:bodyPr/>
-                    <a:lstStyle/>
-                    <a:p>
-                      <a:pPr algn="ctr"/>
-                      <a:r>
-                        <a:rPr sz="1000" b="0"/>
-                        <a:t>High</a:t>
-                      </a:r>
-                    </a:p>
-                  </a:txBody>
-                  <a:tcPr anchor="ctr">
-                    <a:solidFill>
-                      <a:srgbClr val="FFE0B2"/>
-                    </a:solidFill>
-                  </a:tcPr>
-                </a:tc>
-                <a:tc>
-                  <a:txBody>
-                    <a:bodyPr/>
-                    <a:lstStyle/>
-                    <a:p>
-                      <a:pPr algn="ctr"/>
-                      <a:r>
-                        <a:rPr sz="1000" b="0"/>
-                        <a:t>V.High</a:t>
-                      </a:r>
-                    </a:p>
-                  </a:txBody>
-                  <a:tcPr anchor="ctr">
-                    <a:solidFill>
-                      <a:srgbClr val="EF5350"/>
-                    </a:solidFill>
-                  </a:tcPr>
-                </a:tc>
-                <a:tc>
-                  <a:txBody>
-                    <a:bodyPr/>
-                    <a:lstStyle/>
-                    <a:p>
-                      <a:pPr algn="ctr"/>
-                      <a:r>
-                        <a:rPr sz="1000" b="0"/>
-                        <a:t>Low</a:t>
-                      </a:r>
-                    </a:p>
-                  </a:txBody>
-                  <a:tcPr anchor="ctr">
-                    <a:solidFill>
-                      <a:srgbClr val="C8E6C9"/>
-                    </a:solidFill>
-                  </a:tcPr>
-                </a:tc>
-              </a:tr>
-              <a:tr h="571500">
-                <a:tc>
-                  <a:txBody>
-                    <a:bodyPr/>
-                    <a:lstStyle/>
-                    <a:p>
-                      <a:pPr algn="ctr"/>
-                      <a:r>
-                        <a:rPr sz="1000" b="1"/>
-                        <a:t>Glucocorticoids (Intra-articular)</a:t>
-                      </a:r>
-                    </a:p>
-                  </a:txBody>
-                  <a:tcPr anchor="ctr">
-                    <a:solidFill>
-                      <a:srgbClr val="F5F5F5"/>
-                    </a:solidFill>
-                  </a:tcPr>
-                </a:tc>
-                <a:tc>
-                  <a:txBody>
-                    <a:bodyPr/>
-                    <a:lstStyle/>
-                    <a:p>
-                      <a:pPr algn="ctr"/>
-                      <a:r>
-                        <a:rPr sz="1000" b="0"/>
-                        <a:t>High</a:t>
-                      </a:r>
-                    </a:p>
-                  </a:txBody>
-                  <a:tcPr anchor="ctr">
-                    <a:solidFill>
-                      <a:srgbClr val="FFE0B2"/>
-                    </a:solidFill>
-                  </a:tcPr>
-                </a:tc>
-                <a:tc>
-                  <a:txBody>
-                    <a:bodyPr/>
-                    <a:lstStyle/>
-                    <a:p>
-                      <a:pPr algn="ctr"/>
-                      <a:r>
-                        <a:rPr sz="1000" b="0"/>
-                        <a:t>Med</a:t>
-                      </a:r>
-                    </a:p>
-                  </a:txBody>
-                  <a:tcPr anchor="ctr">
-                    <a:solidFill>
-                      <a:srgbClr val="FFF9C4"/>
-                    </a:solidFill>
-                  </a:tcPr>
-                </a:tc>
-                <a:tc>
-                  <a:txBody>
-                    <a:bodyPr/>
-                    <a:lstStyle/>
-                    <a:p>
-                      <a:pPr algn="ctr"/>
-                      <a:r>
-                        <a:rPr sz="1000" b="0"/>
-                        <a:t>Med</a:t>
-                      </a:r>
-                    </a:p>
-                  </a:txBody>
-                  <a:tcPr anchor="ctr">
-                    <a:solidFill>
-                      <a:srgbClr val="FFF9C4"/>
-                    </a:solidFill>
-                  </a:tcPr>
-                </a:tc>
-                <a:tc>
-                  <a:txBody>
-                    <a:bodyPr/>
-                    <a:lstStyle/>
-                    <a:p>
-                      <a:pPr algn="ctr"/>
-                      <a:r>
-                        <a:rPr sz="1000" b="0"/>
-                        <a:t>High</a:t>
-                      </a:r>
-                    </a:p>
-                  </a:txBody>
-                  <a:tcPr anchor="ctr">
-                    <a:solidFill>
-                      <a:srgbClr val="FFE0B2"/>
-                    </a:solidFill>
-                  </a:tcPr>
-                </a:tc>
-                <a:tc>
-                  <a:txBody>
-                    <a:bodyPr/>
-                    <a:lstStyle/>
-                    <a:p>
-                      <a:pPr algn="ctr"/>
-                      <a:r>
-                        <a:rPr sz="1000" b="0"/>
-                        <a:t>High</a:t>
-                      </a:r>
-                    </a:p>
-                  </a:txBody>
-                  <a:tcPr anchor="ctr">
-                    <a:solidFill>
-                      <a:srgbClr val="FFE0B2"/>
-                    </a:solidFill>
-                  </a:tcPr>
-                </a:tc>
-              </a:tr>
-              <a:tr h="571500">
-                <a:tc>
-                  <a:txBody>
-                    <a:bodyPr/>
-                    <a:lstStyle/>
-                    <a:p>
-                      <a:pPr algn="ctr"/>
-                      <a:r>
-                        <a:rPr sz="1000" b="1"/>
-                        <a:t>Cardiovascular (Diuretics/BB)</a:t>
-                      </a:r>
-                    </a:p>
-                  </a:txBody>
-                  <a:tcPr anchor="ctr">
-                    <a:solidFill>
-                      <a:srgbClr val="F5F5F5"/>
-                    </a:solidFill>
-                  </a:tcPr>
-                </a:tc>
-                <a:tc>
-                  <a:txBody>
-                    <a:bodyPr/>
-                    <a:lstStyle/>
-                    <a:p>
-                      <a:pPr algn="ctr"/>
-                      <a:r>
-                        <a:rPr sz="1000" b="0"/>
-                        <a:t>High</a:t>
-                      </a:r>
-                    </a:p>
-                  </a:txBody>
-                  <a:tcPr anchor="ctr">
-                    <a:solidFill>
-                      <a:srgbClr val="FFE0B2"/>
-                    </a:solidFill>
-                  </a:tcPr>
-                </a:tc>
-                <a:tc>
-                  <a:txBody>
-                    <a:bodyPr/>
-                    <a:lstStyle/>
-                    <a:p>
-                      <a:pPr algn="ctr"/>
-                      <a:r>
-                        <a:rPr sz="1000" b="0"/>
-                        <a:t>High</a:t>
-                      </a:r>
-                    </a:p>
-                  </a:txBody>
-                  <a:tcPr anchor="ctr">
-                    <a:solidFill>
-                      <a:srgbClr val="FFE0B2"/>
-                    </a:solidFill>
-                  </a:tcPr>
-                </a:tc>
-                <a:tc>
-                  <a:txBody>
-                    <a:bodyPr/>
-                    <a:lstStyle/>
-                    <a:p>
-                      <a:pPr algn="ctr"/>
-                      <a:r>
-                        <a:rPr sz="1000" b="0"/>
-                        <a:t>High</a:t>
-                      </a:r>
-                    </a:p>
-                  </a:txBody>
-                  <a:tcPr anchor="ctr">
-                    <a:solidFill>
-                      <a:srgbClr val="FFE0B2"/>
-                    </a:solidFill>
-                  </a:tcPr>
-                </a:tc>
-                <a:tc>
-                  <a:txBody>
-                    <a:bodyPr/>
-                    <a:lstStyle/>
-                    <a:p>
-                      <a:pPr algn="ctr"/>
-                      <a:r>
-                        <a:rPr sz="1000" b="0"/>
-                        <a:t>High</a:t>
-                      </a:r>
-                    </a:p>
-                  </a:txBody>
-                  <a:tcPr anchor="ctr">
-                    <a:solidFill>
-                      <a:srgbClr val="FFE0B2"/>
-                    </a:solidFill>
-                  </a:tcPr>
-                </a:tc>
-                <a:tc>
-                  <a:txBody>
-                    <a:bodyPr/>
-                    <a:lstStyle/>
-                    <a:p>
-                      <a:pPr algn="ctr"/>
-                      <a:r>
-                        <a:rPr sz="1000" b="0"/>
-                        <a:t>Med</a:t>
-                      </a:r>
-                    </a:p>
-                  </a:txBody>
-                  <a:tcPr anchor="ctr">
-                    <a:solidFill>
-                      <a:srgbClr val="FFF9C4"/>
-                    </a:solidFill>
-                  </a:tcPr>
-                </a:tc>
-              </a:tr>
-              <a:tr h="571500">
-                <a:tc>
-                  <a:txBody>
-                    <a:bodyPr/>
-                    <a:lstStyle/>
-                    <a:p>
-                      <a:pPr algn="ctr"/>
-                      <a:r>
-                        <a:rPr sz="1000" b="1"/>
-                        <a:t>PCOS/Fertility (Letrozole/Clomiphene)</a:t>
-                      </a:r>
-                    </a:p>
-                  </a:txBody>
-                  <a:tcPr anchor="ctr">
-                    <a:solidFill>
-                      <a:srgbClr val="F5F5F5"/>
-                    </a:solidFill>
-                  </a:tcPr>
-                </a:tc>
-                <a:tc>
-                  <a:txBody>
-                    <a:bodyPr/>
-                    <a:lstStyle/>
-                    <a:p>
-                      <a:pPr algn="ctr"/>
-                      <a:r>
-                        <a:rPr sz="1000" b="0"/>
-                        <a:t>V.High</a:t>
-                      </a:r>
-                    </a:p>
-                  </a:txBody>
-                  <a:tcPr anchor="ctr">
-                    <a:solidFill>
-                      <a:srgbClr val="EF5350"/>
-                    </a:solidFill>
-                  </a:tcPr>
-                </a:tc>
-                <a:tc>
-                  <a:txBody>
-                    <a:bodyPr/>
-                    <a:lstStyle/>
-                    <a:p>
-                      <a:pPr algn="ctr"/>
-                      <a:r>
-                        <a:rPr sz="1000" b="0"/>
-                        <a:t>High</a:t>
-                      </a:r>
-                    </a:p>
-                  </a:txBody>
-                  <a:tcPr anchor="ctr">
-                    <a:solidFill>
-                      <a:srgbClr val="FFE0B2"/>
-                    </a:solidFill>
-                  </a:tcPr>
-                </a:tc>
-                <a:tc>
-                  <a:txBody>
-                    <a:bodyPr/>
-                    <a:lstStyle/>
-                    <a:p>
-                      <a:pPr algn="ctr"/>
-                      <a:r>
-                        <a:rPr sz="1000" b="0"/>
-                        <a:t>Med</a:t>
-                      </a:r>
-                    </a:p>
-                  </a:txBody>
-                  <a:tcPr anchor="ctr">
-                    <a:solidFill>
-                      <a:srgbClr val="FFF9C4"/>
-                    </a:solidFill>
-                  </a:tcPr>
-                </a:tc>
-                <a:tc>
-                  <a:txBody>
-                    <a:bodyPr/>
-                    <a:lstStyle/>
-                    <a:p>
-                      <a:pPr algn="ctr"/>
-                      <a:r>
-                        <a:rPr sz="1000" b="0"/>
-                        <a:t>High</a:t>
-                      </a:r>
-                    </a:p>
-                  </a:txBody>
-                  <a:tcPr anchor="ctr">
-                    <a:solidFill>
-                      <a:srgbClr val="FFE0B2"/>
-                    </a:solidFill>
-                  </a:tcPr>
-                </a:tc>
-                <a:tc>
-                  <a:txBody>
-                    <a:bodyPr/>
-                    <a:lstStyle/>
-                    <a:p>
-                      <a:pPr algn="ctr"/>
-                      <a:r>
-                        <a:rPr sz="1000" b="0"/>
-                        <a:t>Low</a:t>
-                      </a:r>
-                    </a:p>
-                  </a:txBody>
-                  <a:tcPr anchor="ctr">
-                    <a:solidFill>
-                      <a:srgbClr val="C8E6C9"/>
-                    </a:solidFill>
-                  </a:tcPr>
-                </a:tc>
-              </a:tr>
-            </a:tbl>
-          </a:graphicData>
-        </a:graphic>
-      </p:graphicFrame>
-      <p:sp>
-        <p:nvSpPr>
-          <p:cNvPr id="4" name="TextBox 3"/>
+      <p:sp>
+        <p:nvSpPr>
+          <p:cNvPr id="3" name="TextBox 2"/>
           <p:cNvSpPr txBox="1"/>
           <p:nvPr/>
         </p:nvSpPr>
         <p:spPr>
           <a:xfrm>
-            <a:off x="457200" y="5943600"/>
-            <a:ext cx="11247120" cy="548640"/>
+            <a:off x="2743200" y="1097280"/>
+            <a:ext cx="1554480" cy="548640"/>
           </a:xfrm>
           <a:prstGeom prst="rect">
             <a:avLst/>
@@ -4092,13 +3147,2586 @@
           <a:p>
             <a:pPr algn="ctr"/>
             <a:r>
-              <a:rPr sz="1200" i="1">
+              <a:rPr sz="800" b="1" i="0">
                 <a:solidFill>
                   <a:srgbClr val="424242"/>
                 </a:solidFill>
               </a:rPr>
-              <a:t>Figure 3. Clinical-competition gap risk matrix by disease area and assessment dimension.
-Severity: None (0), Low (1), Medium (2), High (3), Very High (4).</a:t>
+              <a:t>First-line Rx
+Prohibited</a:t>
+            </a:r>
+          </a:p>
+        </p:txBody>
+      </p:sp>
+      <p:sp>
+        <p:nvSpPr>
+          <p:cNvPr id="4" name="TextBox 3"/>
+          <p:cNvSpPr txBox="1"/>
+          <p:nvPr/>
+        </p:nvSpPr>
+        <p:spPr>
+          <a:xfrm>
+            <a:off x="4297680" y="1097280"/>
+            <a:ext cx="1554480" cy="548640"/>
+          </a:xfrm>
+          <a:prstGeom prst="rect">
+            <a:avLst/>
+          </a:prstGeom>
+          <a:noFill/>
+        </p:spPr>
+        <p:txBody>
+          <a:bodyPr wrap="square">
+            <a:spAutoFit/>
+          </a:bodyPr>
+          <a:lstStyle/>
+          <a:p>
+            <a:pPr algn="ctr"/>
+            <a:r>
+              <a:rPr sz="800" b="1" i="0">
+                <a:solidFill>
+                  <a:srgbClr val="424242"/>
+                </a:solidFill>
+              </a:rPr>
+              <a:t>TUE Process
+Complexity</a:t>
+            </a:r>
+          </a:p>
+        </p:txBody>
+      </p:sp>
+      <p:sp>
+        <p:nvSpPr>
+          <p:cNvPr id="5" name="TextBox 4"/>
+          <p:cNvSpPr txBox="1"/>
+          <p:nvPr/>
+        </p:nvSpPr>
+        <p:spPr>
+          <a:xfrm>
+            <a:off x="5852160" y="1097280"/>
+            <a:ext cx="1554480" cy="548640"/>
+          </a:xfrm>
+          <a:prstGeom prst="rect">
+            <a:avLst/>
+          </a:prstGeom>
+          <a:noFill/>
+        </p:spPr>
+        <p:txBody>
+          <a:bodyPr wrap="square">
+            <a:spAutoFit/>
+          </a:bodyPr>
+          <a:lstStyle/>
+          <a:p>
+            <a:pPr algn="ctr"/>
+            <a:r>
+              <a:rPr sz="800" b="1" i="0">
+                <a:solidFill>
+                  <a:srgbClr val="424242"/>
+                </a:solidFill>
+              </a:rPr>
+              <a:t>Guideline
+Update Lag</a:t>
+            </a:r>
+          </a:p>
+        </p:txBody>
+      </p:sp>
+      <p:sp>
+        <p:nvSpPr>
+          <p:cNvPr id="6" name="TextBox 5"/>
+          <p:cNvSpPr txBox="1"/>
+          <p:nvPr/>
+        </p:nvSpPr>
+        <p:spPr>
+          <a:xfrm>
+            <a:off x="7406640" y="1097280"/>
+            <a:ext cx="1554480" cy="548640"/>
+          </a:xfrm>
+          <a:prstGeom prst="rect">
+            <a:avLst/>
+          </a:prstGeom>
+          <a:noFill/>
+        </p:spPr>
+        <p:txBody>
+          <a:bodyPr wrap="square">
+            <a:spAutoFit/>
+          </a:bodyPr>
+          <a:lstStyle/>
+          <a:p>
+            <a:pPr algn="ctr"/>
+            <a:r>
+              <a:rPr sz="800" b="1" i="0">
+                <a:solidFill>
+                  <a:srgbClr val="424242"/>
+                </a:solidFill>
+              </a:rPr>
+              <a:t>Athlete
+Impact</a:t>
+            </a:r>
+          </a:p>
+        </p:txBody>
+      </p:sp>
+      <p:sp>
+        <p:nvSpPr>
+          <p:cNvPr id="7" name="TextBox 6"/>
+          <p:cNvSpPr txBox="1"/>
+          <p:nvPr/>
+        </p:nvSpPr>
+        <p:spPr>
+          <a:xfrm>
+            <a:off x="8961120" y="1097280"/>
+            <a:ext cx="1554480" cy="548640"/>
+          </a:xfrm>
+          <a:prstGeom prst="rect">
+            <a:avLst/>
+          </a:prstGeom>
+          <a:noFill/>
+        </p:spPr>
+        <p:txBody>
+          <a:bodyPr wrap="square">
+            <a:spAutoFit/>
+          </a:bodyPr>
+          <a:lstStyle/>
+          <a:p>
+            <a:pPr algn="ctr"/>
+            <a:r>
+              <a:rPr sz="800" b="1" i="0">
+                <a:solidFill>
+                  <a:srgbClr val="424242"/>
+                </a:solidFill>
+              </a:rPr>
+              <a:t>Alternative Rx
+Availability</a:t>
+            </a:r>
+          </a:p>
+        </p:txBody>
+      </p:sp>
+      <p:sp>
+        <p:nvSpPr>
+          <p:cNvPr id="8" name="TextBox 7"/>
+          <p:cNvSpPr txBox="1"/>
+          <p:nvPr/>
+        </p:nvSpPr>
+        <p:spPr>
+          <a:xfrm>
+            <a:off x="182880" y="1691640"/>
+            <a:ext cx="2560320" cy="640080"/>
+          </a:xfrm>
+          <a:prstGeom prst="rect">
+            <a:avLst/>
+          </a:prstGeom>
+          <a:noFill/>
+        </p:spPr>
+        <p:txBody>
+          <a:bodyPr wrap="square">
+            <a:spAutoFit/>
+          </a:bodyPr>
+          <a:lstStyle/>
+          <a:p>
+            <a:pPr algn="r"/>
+            <a:r>
+              <a:rPr sz="800" b="0" i="0">
+                <a:solidFill>
+                  <a:srgbClr val="424242"/>
+                </a:solidFill>
+              </a:rPr>
+              <a:t>Asthma
+(Beta-2 agonists)</a:t>
+            </a:r>
+          </a:p>
+        </p:txBody>
+      </p:sp>
+      <p:sp>
+        <p:nvSpPr>
+          <p:cNvPr id="9" name="Rectangle 8"/>
+          <p:cNvSpPr/>
+          <p:nvPr/>
+        </p:nvSpPr>
+        <p:spPr>
+          <a:xfrm>
+            <a:off x="2743200" y="1691640"/>
+            <a:ext cx="1508760" cy="594360"/>
+          </a:xfrm>
+          <a:prstGeom prst="rect">
+            <a:avLst/>
+          </a:prstGeom>
+          <a:solidFill>
+            <a:srgbClr val="FFF9C4"/>
+          </a:solidFill>
+          <a:ln w="25400">
+            <a:solidFill>
+              <a:srgbClr val="FFFFFF"/>
+            </a:solidFill>
+          </a:ln>
+        </p:spPr>
+        <p:style>
+          <a:lnRef idx="1">
+            <a:schemeClr val="accent1"/>
+          </a:lnRef>
+          <a:fillRef idx="3">
+            <a:schemeClr val="accent1"/>
+          </a:fillRef>
+          <a:effectRef idx="2">
+            <a:schemeClr val="accent1"/>
+          </a:effectRef>
+          <a:fontRef idx="minor">
+            <a:schemeClr val="lt1"/>
+          </a:fontRef>
+        </p:style>
+        <p:txBody>
+          <a:bodyPr rtlCol="0" anchor="ctr" wrap="square" tIns="0" bIns="0"/>
+          <a:lstStyle/>
+          <a:p>
+            <a:pPr algn="ctr"/>
+            <a:r>
+              <a:rPr sz="1000" b="1">
+                <a:solidFill>
+                  <a:srgbClr val="424242"/>
+                </a:solidFill>
+              </a:rPr>
+              <a:t>Med</a:t>
+            </a:r>
+          </a:p>
+        </p:txBody>
+      </p:sp>
+      <p:sp>
+        <p:nvSpPr>
+          <p:cNvPr id="10" name="Rectangle 9"/>
+          <p:cNvSpPr/>
+          <p:nvPr/>
+        </p:nvSpPr>
+        <p:spPr>
+          <a:xfrm>
+            <a:off x="4297680" y="1691640"/>
+            <a:ext cx="1508760" cy="594360"/>
+          </a:xfrm>
+          <a:prstGeom prst="rect">
+            <a:avLst/>
+          </a:prstGeom>
+          <a:solidFill>
+            <a:srgbClr val="FFF9C4"/>
+          </a:solidFill>
+          <a:ln w="25400">
+            <a:solidFill>
+              <a:srgbClr val="FFFFFF"/>
+            </a:solidFill>
+          </a:ln>
+        </p:spPr>
+        <p:style>
+          <a:lnRef idx="1">
+            <a:schemeClr val="accent1"/>
+          </a:lnRef>
+          <a:fillRef idx="3">
+            <a:schemeClr val="accent1"/>
+          </a:fillRef>
+          <a:effectRef idx="2">
+            <a:schemeClr val="accent1"/>
+          </a:effectRef>
+          <a:fontRef idx="minor">
+            <a:schemeClr val="lt1"/>
+          </a:fontRef>
+        </p:style>
+        <p:txBody>
+          <a:bodyPr rtlCol="0" anchor="ctr" wrap="square" tIns="0" bIns="0"/>
+          <a:lstStyle/>
+          <a:p>
+            <a:pPr algn="ctr"/>
+            <a:r>
+              <a:rPr sz="1000" b="1">
+                <a:solidFill>
+                  <a:srgbClr val="424242"/>
+                </a:solidFill>
+              </a:rPr>
+              <a:t>Med</a:t>
+            </a:r>
+          </a:p>
+        </p:txBody>
+      </p:sp>
+      <p:sp>
+        <p:nvSpPr>
+          <p:cNvPr id="11" name="Rectangle 10"/>
+          <p:cNvSpPr/>
+          <p:nvPr/>
+        </p:nvSpPr>
+        <p:spPr>
+          <a:xfrm>
+            <a:off x="5852160" y="1691640"/>
+            <a:ext cx="1508760" cy="594360"/>
+          </a:xfrm>
+          <a:prstGeom prst="rect">
+            <a:avLst/>
+          </a:prstGeom>
+          <a:solidFill>
+            <a:srgbClr val="FFF9C4"/>
+          </a:solidFill>
+          <a:ln w="25400">
+            <a:solidFill>
+              <a:srgbClr val="FFFFFF"/>
+            </a:solidFill>
+          </a:ln>
+        </p:spPr>
+        <p:style>
+          <a:lnRef idx="1">
+            <a:schemeClr val="accent1"/>
+          </a:lnRef>
+          <a:fillRef idx="3">
+            <a:schemeClr val="accent1"/>
+          </a:fillRef>
+          <a:effectRef idx="2">
+            <a:schemeClr val="accent1"/>
+          </a:effectRef>
+          <a:fontRef idx="minor">
+            <a:schemeClr val="lt1"/>
+          </a:fontRef>
+        </p:style>
+        <p:txBody>
+          <a:bodyPr rtlCol="0" anchor="ctr" wrap="square" tIns="0" bIns="0"/>
+          <a:lstStyle/>
+          <a:p>
+            <a:pPr algn="ctr"/>
+            <a:r>
+              <a:rPr sz="1000" b="1">
+                <a:solidFill>
+                  <a:srgbClr val="424242"/>
+                </a:solidFill>
+              </a:rPr>
+              <a:t>Med</a:t>
+            </a:r>
+          </a:p>
+        </p:txBody>
+      </p:sp>
+      <p:sp>
+        <p:nvSpPr>
+          <p:cNvPr id="12" name="Rectangle 11"/>
+          <p:cNvSpPr/>
+          <p:nvPr/>
+        </p:nvSpPr>
+        <p:spPr>
+          <a:xfrm>
+            <a:off x="7406640" y="1691640"/>
+            <a:ext cx="1508760" cy="594360"/>
+          </a:xfrm>
+          <a:prstGeom prst="rect">
+            <a:avLst/>
+          </a:prstGeom>
+          <a:solidFill>
+            <a:srgbClr val="FFE0B2"/>
+          </a:solidFill>
+          <a:ln w="25400">
+            <a:solidFill>
+              <a:srgbClr val="FFFFFF"/>
+            </a:solidFill>
+          </a:ln>
+        </p:spPr>
+        <p:style>
+          <a:lnRef idx="1">
+            <a:schemeClr val="accent1"/>
+          </a:lnRef>
+          <a:fillRef idx="3">
+            <a:schemeClr val="accent1"/>
+          </a:fillRef>
+          <a:effectRef idx="2">
+            <a:schemeClr val="accent1"/>
+          </a:effectRef>
+          <a:fontRef idx="minor">
+            <a:schemeClr val="lt1"/>
+          </a:fontRef>
+        </p:style>
+        <p:txBody>
+          <a:bodyPr rtlCol="0" anchor="ctr" wrap="square" tIns="0" bIns="0"/>
+          <a:lstStyle/>
+          <a:p>
+            <a:pPr algn="ctr"/>
+            <a:r>
+              <a:rPr sz="1000" b="1">
+                <a:solidFill>
+                  <a:srgbClr val="FFFFFF"/>
+                </a:solidFill>
+              </a:rPr>
+              <a:t>High</a:t>
+            </a:r>
+          </a:p>
+        </p:txBody>
+      </p:sp>
+      <p:sp>
+        <p:nvSpPr>
+          <p:cNvPr id="13" name="Rectangle 12"/>
+          <p:cNvSpPr/>
+          <p:nvPr/>
+        </p:nvSpPr>
+        <p:spPr>
+          <a:xfrm>
+            <a:off x="8961120" y="1691640"/>
+            <a:ext cx="1508760" cy="594360"/>
+          </a:xfrm>
+          <a:prstGeom prst="rect">
+            <a:avLst/>
+          </a:prstGeom>
+          <a:solidFill>
+            <a:srgbClr val="EF5350"/>
+          </a:solidFill>
+          <a:ln w="25400">
+            <a:solidFill>
+              <a:srgbClr val="FFFFFF"/>
+            </a:solidFill>
+          </a:ln>
+        </p:spPr>
+        <p:style>
+          <a:lnRef idx="1">
+            <a:schemeClr val="accent1"/>
+          </a:lnRef>
+          <a:fillRef idx="3">
+            <a:schemeClr val="accent1"/>
+          </a:fillRef>
+          <a:effectRef idx="2">
+            <a:schemeClr val="accent1"/>
+          </a:effectRef>
+          <a:fontRef idx="minor">
+            <a:schemeClr val="lt1"/>
+          </a:fontRef>
+        </p:style>
+        <p:txBody>
+          <a:bodyPr rtlCol="0" anchor="ctr" wrap="square" tIns="0" bIns="0"/>
+          <a:lstStyle/>
+          <a:p>
+            <a:pPr algn="ctr"/>
+            <a:r>
+              <a:rPr sz="1000" b="1">
+                <a:solidFill>
+                  <a:srgbClr val="FFFFFF"/>
+                </a:solidFill>
+              </a:rPr>
+              <a:t>V.High</a:t>
+            </a:r>
+          </a:p>
+        </p:txBody>
+      </p:sp>
+      <p:sp>
+        <p:nvSpPr>
+          <p:cNvPr id="14" name="TextBox 13"/>
+          <p:cNvSpPr txBox="1"/>
+          <p:nvPr/>
+        </p:nvSpPr>
+        <p:spPr>
+          <a:xfrm>
+            <a:off x="182880" y="2331720"/>
+            <a:ext cx="2560320" cy="640080"/>
+          </a:xfrm>
+          <a:prstGeom prst="rect">
+            <a:avLst/>
+          </a:prstGeom>
+          <a:noFill/>
+        </p:spPr>
+        <p:txBody>
+          <a:bodyPr wrap="square">
+            <a:spAutoFit/>
+          </a:bodyPr>
+          <a:lstStyle/>
+          <a:p>
+            <a:pPr algn="r"/>
+            <a:r>
+              <a:rPr sz="800" b="0" i="0">
+                <a:solidFill>
+                  <a:srgbClr val="424242"/>
+                </a:solidFill>
+              </a:rPr>
+              <a:t>ADHD
+(Stimulants)</a:t>
+            </a:r>
+          </a:p>
+        </p:txBody>
+      </p:sp>
+      <p:sp>
+        <p:nvSpPr>
+          <p:cNvPr id="15" name="Rectangle 14"/>
+          <p:cNvSpPr/>
+          <p:nvPr/>
+        </p:nvSpPr>
+        <p:spPr>
+          <a:xfrm>
+            <a:off x="2743200" y="2331720"/>
+            <a:ext cx="1508760" cy="594360"/>
+          </a:xfrm>
+          <a:prstGeom prst="rect">
+            <a:avLst/>
+          </a:prstGeom>
+          <a:solidFill>
+            <a:srgbClr val="EF5350"/>
+          </a:solidFill>
+          <a:ln w="25400">
+            <a:solidFill>
+              <a:srgbClr val="FFFFFF"/>
+            </a:solidFill>
+          </a:ln>
+        </p:spPr>
+        <p:style>
+          <a:lnRef idx="1">
+            <a:schemeClr val="accent1"/>
+          </a:lnRef>
+          <a:fillRef idx="3">
+            <a:schemeClr val="accent1"/>
+          </a:fillRef>
+          <a:effectRef idx="2">
+            <a:schemeClr val="accent1"/>
+          </a:effectRef>
+          <a:fontRef idx="minor">
+            <a:schemeClr val="lt1"/>
+          </a:fontRef>
+        </p:style>
+        <p:txBody>
+          <a:bodyPr rtlCol="0" anchor="ctr" wrap="square" tIns="0" bIns="0"/>
+          <a:lstStyle/>
+          <a:p>
+            <a:pPr algn="ctr"/>
+            <a:r>
+              <a:rPr sz="1000" b="1">
+                <a:solidFill>
+                  <a:srgbClr val="FFFFFF"/>
+                </a:solidFill>
+              </a:rPr>
+              <a:t>V.High</a:t>
+            </a:r>
+          </a:p>
+        </p:txBody>
+      </p:sp>
+      <p:sp>
+        <p:nvSpPr>
+          <p:cNvPr id="16" name="Rectangle 15"/>
+          <p:cNvSpPr/>
+          <p:nvPr/>
+        </p:nvSpPr>
+        <p:spPr>
+          <a:xfrm>
+            <a:off x="4297680" y="2331720"/>
+            <a:ext cx="1508760" cy="594360"/>
+          </a:xfrm>
+          <a:prstGeom prst="rect">
+            <a:avLst/>
+          </a:prstGeom>
+          <a:solidFill>
+            <a:srgbClr val="EF5350"/>
+          </a:solidFill>
+          <a:ln w="25400">
+            <a:solidFill>
+              <a:srgbClr val="FFFFFF"/>
+            </a:solidFill>
+          </a:ln>
+        </p:spPr>
+        <p:style>
+          <a:lnRef idx="1">
+            <a:schemeClr val="accent1"/>
+          </a:lnRef>
+          <a:fillRef idx="3">
+            <a:schemeClr val="accent1"/>
+          </a:fillRef>
+          <a:effectRef idx="2">
+            <a:schemeClr val="accent1"/>
+          </a:effectRef>
+          <a:fontRef idx="minor">
+            <a:schemeClr val="lt1"/>
+          </a:fontRef>
+        </p:style>
+        <p:txBody>
+          <a:bodyPr rtlCol="0" anchor="ctr" wrap="square" tIns="0" bIns="0"/>
+          <a:lstStyle/>
+          <a:p>
+            <a:pPr algn="ctr"/>
+            <a:r>
+              <a:rPr sz="1000" b="1">
+                <a:solidFill>
+                  <a:srgbClr val="FFFFFF"/>
+                </a:solidFill>
+              </a:rPr>
+              <a:t>V.High</a:t>
+            </a:r>
+          </a:p>
+        </p:txBody>
+      </p:sp>
+      <p:sp>
+        <p:nvSpPr>
+          <p:cNvPr id="17" name="Rectangle 16"/>
+          <p:cNvSpPr/>
+          <p:nvPr/>
+        </p:nvSpPr>
+        <p:spPr>
+          <a:xfrm>
+            <a:off x="5852160" y="2331720"/>
+            <a:ext cx="1508760" cy="594360"/>
+          </a:xfrm>
+          <a:prstGeom prst="rect">
+            <a:avLst/>
+          </a:prstGeom>
+          <a:solidFill>
+            <a:srgbClr val="FFF9C4"/>
+          </a:solidFill>
+          <a:ln w="25400">
+            <a:solidFill>
+              <a:srgbClr val="FFFFFF"/>
+            </a:solidFill>
+          </a:ln>
+        </p:spPr>
+        <p:style>
+          <a:lnRef idx="1">
+            <a:schemeClr val="accent1"/>
+          </a:lnRef>
+          <a:fillRef idx="3">
+            <a:schemeClr val="accent1"/>
+          </a:fillRef>
+          <a:effectRef idx="2">
+            <a:schemeClr val="accent1"/>
+          </a:effectRef>
+          <a:fontRef idx="minor">
+            <a:schemeClr val="lt1"/>
+          </a:fontRef>
+        </p:style>
+        <p:txBody>
+          <a:bodyPr rtlCol="0" anchor="ctr" wrap="square" tIns="0" bIns="0"/>
+          <a:lstStyle/>
+          <a:p>
+            <a:pPr algn="ctr"/>
+            <a:r>
+              <a:rPr sz="1000" b="1">
+                <a:solidFill>
+                  <a:srgbClr val="424242"/>
+                </a:solidFill>
+              </a:rPr>
+              <a:t>Med</a:t>
+            </a:r>
+          </a:p>
+        </p:txBody>
+      </p:sp>
+      <p:sp>
+        <p:nvSpPr>
+          <p:cNvPr id="18" name="Rectangle 17"/>
+          <p:cNvSpPr/>
+          <p:nvPr/>
+        </p:nvSpPr>
+        <p:spPr>
+          <a:xfrm>
+            <a:off x="7406640" y="2331720"/>
+            <a:ext cx="1508760" cy="594360"/>
+          </a:xfrm>
+          <a:prstGeom prst="rect">
+            <a:avLst/>
+          </a:prstGeom>
+          <a:solidFill>
+            <a:srgbClr val="EF5350"/>
+          </a:solidFill>
+          <a:ln w="25400">
+            <a:solidFill>
+              <a:srgbClr val="FFFFFF"/>
+            </a:solidFill>
+          </a:ln>
+        </p:spPr>
+        <p:style>
+          <a:lnRef idx="1">
+            <a:schemeClr val="accent1"/>
+          </a:lnRef>
+          <a:fillRef idx="3">
+            <a:schemeClr val="accent1"/>
+          </a:fillRef>
+          <a:effectRef idx="2">
+            <a:schemeClr val="accent1"/>
+          </a:effectRef>
+          <a:fontRef idx="minor">
+            <a:schemeClr val="lt1"/>
+          </a:fontRef>
+        </p:style>
+        <p:txBody>
+          <a:bodyPr rtlCol="0" anchor="ctr" wrap="square" tIns="0" bIns="0"/>
+          <a:lstStyle/>
+          <a:p>
+            <a:pPr algn="ctr"/>
+            <a:r>
+              <a:rPr sz="1000" b="1">
+                <a:solidFill>
+                  <a:srgbClr val="FFFFFF"/>
+                </a:solidFill>
+              </a:rPr>
+              <a:t>V.High</a:t>
+            </a:r>
+          </a:p>
+        </p:txBody>
+      </p:sp>
+      <p:sp>
+        <p:nvSpPr>
+          <p:cNvPr id="19" name="Rectangle 18"/>
+          <p:cNvSpPr/>
+          <p:nvPr/>
+        </p:nvSpPr>
+        <p:spPr>
+          <a:xfrm>
+            <a:off x="8961120" y="2331720"/>
+            <a:ext cx="1508760" cy="594360"/>
+          </a:xfrm>
+          <a:prstGeom prst="rect">
+            <a:avLst/>
+          </a:prstGeom>
+          <a:solidFill>
+            <a:srgbClr val="FFF9C4"/>
+          </a:solidFill>
+          <a:ln w="25400">
+            <a:solidFill>
+              <a:srgbClr val="FFFFFF"/>
+            </a:solidFill>
+          </a:ln>
+        </p:spPr>
+        <p:style>
+          <a:lnRef idx="1">
+            <a:schemeClr val="accent1"/>
+          </a:lnRef>
+          <a:fillRef idx="3">
+            <a:schemeClr val="accent1"/>
+          </a:fillRef>
+          <a:effectRef idx="2">
+            <a:schemeClr val="accent1"/>
+          </a:effectRef>
+          <a:fontRef idx="minor">
+            <a:schemeClr val="lt1"/>
+          </a:fontRef>
+        </p:style>
+        <p:txBody>
+          <a:bodyPr rtlCol="0" anchor="ctr" wrap="square" tIns="0" bIns="0"/>
+          <a:lstStyle/>
+          <a:p>
+            <a:pPr algn="ctr"/>
+            <a:r>
+              <a:rPr sz="1000" b="1">
+                <a:solidFill>
+                  <a:srgbClr val="424242"/>
+                </a:solidFill>
+              </a:rPr>
+              <a:t>Med</a:t>
+            </a:r>
+          </a:p>
+        </p:txBody>
+      </p:sp>
+      <p:sp>
+        <p:nvSpPr>
+          <p:cNvPr id="20" name="TextBox 19"/>
+          <p:cNvSpPr txBox="1"/>
+          <p:nvPr/>
+        </p:nvSpPr>
+        <p:spPr>
+          <a:xfrm>
+            <a:off x="182880" y="2971800"/>
+            <a:ext cx="2560320" cy="640080"/>
+          </a:xfrm>
+          <a:prstGeom prst="rect">
+            <a:avLst/>
+          </a:prstGeom>
+          <a:noFill/>
+        </p:spPr>
+        <p:txBody>
+          <a:bodyPr wrap="square">
+            <a:spAutoFit/>
+          </a:bodyPr>
+          <a:lstStyle/>
+          <a:p>
+            <a:pPr algn="r"/>
+            <a:r>
+              <a:rPr sz="800" b="0" i="0">
+                <a:solidFill>
+                  <a:srgbClr val="424242"/>
+                </a:solidFill>
+              </a:rPr>
+              <a:t>Type 2 Diabetes
+(GLP-1 RAs)</a:t>
+            </a:r>
+          </a:p>
+        </p:txBody>
+      </p:sp>
+      <p:sp>
+        <p:nvSpPr>
+          <p:cNvPr id="21" name="Rectangle 20"/>
+          <p:cNvSpPr/>
+          <p:nvPr/>
+        </p:nvSpPr>
+        <p:spPr>
+          <a:xfrm>
+            <a:off x="2743200" y="2971800"/>
+            <a:ext cx="1508760" cy="594360"/>
+          </a:xfrm>
+          <a:prstGeom prst="rect">
+            <a:avLst/>
+          </a:prstGeom>
+          <a:solidFill>
+            <a:srgbClr val="C8E6C9"/>
+          </a:solidFill>
+          <a:ln w="25400">
+            <a:solidFill>
+              <a:srgbClr val="FFFFFF"/>
+            </a:solidFill>
+          </a:ln>
+        </p:spPr>
+        <p:style>
+          <a:lnRef idx="1">
+            <a:schemeClr val="accent1"/>
+          </a:lnRef>
+          <a:fillRef idx="3">
+            <a:schemeClr val="accent1"/>
+          </a:fillRef>
+          <a:effectRef idx="2">
+            <a:schemeClr val="accent1"/>
+          </a:effectRef>
+          <a:fontRef idx="minor">
+            <a:schemeClr val="lt1"/>
+          </a:fontRef>
+        </p:style>
+        <p:txBody>
+          <a:bodyPr rtlCol="0" anchor="ctr" wrap="square" tIns="0" bIns="0"/>
+          <a:lstStyle/>
+          <a:p>
+            <a:pPr algn="ctr"/>
+            <a:r>
+              <a:rPr sz="1000" b="1">
+                <a:solidFill>
+                  <a:srgbClr val="424242"/>
+                </a:solidFill>
+              </a:rPr>
+              <a:t>Low</a:t>
+            </a:r>
+          </a:p>
+        </p:txBody>
+      </p:sp>
+      <p:sp>
+        <p:nvSpPr>
+          <p:cNvPr id="22" name="Rectangle 21"/>
+          <p:cNvSpPr/>
+          <p:nvPr/>
+        </p:nvSpPr>
+        <p:spPr>
+          <a:xfrm>
+            <a:off x="4297680" y="2971800"/>
+            <a:ext cx="1508760" cy="594360"/>
+          </a:xfrm>
+          <a:prstGeom prst="rect">
+            <a:avLst/>
+          </a:prstGeom>
+          <a:solidFill>
+            <a:srgbClr val="FFF9C4"/>
+          </a:solidFill>
+          <a:ln w="25400">
+            <a:solidFill>
+              <a:srgbClr val="FFFFFF"/>
+            </a:solidFill>
+          </a:ln>
+        </p:spPr>
+        <p:style>
+          <a:lnRef idx="1">
+            <a:schemeClr val="accent1"/>
+          </a:lnRef>
+          <a:fillRef idx="3">
+            <a:schemeClr val="accent1"/>
+          </a:fillRef>
+          <a:effectRef idx="2">
+            <a:schemeClr val="accent1"/>
+          </a:effectRef>
+          <a:fontRef idx="minor">
+            <a:schemeClr val="lt1"/>
+          </a:fontRef>
+        </p:style>
+        <p:txBody>
+          <a:bodyPr rtlCol="0" anchor="ctr" wrap="square" tIns="0" bIns="0"/>
+          <a:lstStyle/>
+          <a:p>
+            <a:pPr algn="ctr"/>
+            <a:r>
+              <a:rPr sz="1000" b="1">
+                <a:solidFill>
+                  <a:srgbClr val="424242"/>
+                </a:solidFill>
+              </a:rPr>
+              <a:t>Med</a:t>
+            </a:r>
+          </a:p>
+        </p:txBody>
+      </p:sp>
+      <p:sp>
+        <p:nvSpPr>
+          <p:cNvPr id="23" name="Rectangle 22"/>
+          <p:cNvSpPr/>
+          <p:nvPr/>
+        </p:nvSpPr>
+        <p:spPr>
+          <a:xfrm>
+            <a:off x="5852160" y="2971800"/>
+            <a:ext cx="1508760" cy="594360"/>
+          </a:xfrm>
+          <a:prstGeom prst="rect">
+            <a:avLst/>
+          </a:prstGeom>
+          <a:solidFill>
+            <a:srgbClr val="FFE0B2"/>
+          </a:solidFill>
+          <a:ln w="25400">
+            <a:solidFill>
+              <a:srgbClr val="FFFFFF"/>
+            </a:solidFill>
+          </a:ln>
+        </p:spPr>
+        <p:style>
+          <a:lnRef idx="1">
+            <a:schemeClr val="accent1"/>
+          </a:lnRef>
+          <a:fillRef idx="3">
+            <a:schemeClr val="accent1"/>
+          </a:fillRef>
+          <a:effectRef idx="2">
+            <a:schemeClr val="accent1"/>
+          </a:effectRef>
+          <a:fontRef idx="minor">
+            <a:schemeClr val="lt1"/>
+          </a:fontRef>
+        </p:style>
+        <p:txBody>
+          <a:bodyPr rtlCol="0" anchor="ctr" wrap="square" tIns="0" bIns="0"/>
+          <a:lstStyle/>
+          <a:p>
+            <a:pPr algn="ctr"/>
+            <a:r>
+              <a:rPr sz="1000" b="1">
+                <a:solidFill>
+                  <a:srgbClr val="FFFFFF"/>
+                </a:solidFill>
+              </a:rPr>
+              <a:t>High</a:t>
+            </a:r>
+          </a:p>
+        </p:txBody>
+      </p:sp>
+      <p:sp>
+        <p:nvSpPr>
+          <p:cNvPr id="24" name="Rectangle 23"/>
+          <p:cNvSpPr/>
+          <p:nvPr/>
+        </p:nvSpPr>
+        <p:spPr>
+          <a:xfrm>
+            <a:off x="7406640" y="2971800"/>
+            <a:ext cx="1508760" cy="594360"/>
+          </a:xfrm>
+          <a:prstGeom prst="rect">
+            <a:avLst/>
+          </a:prstGeom>
+          <a:solidFill>
+            <a:srgbClr val="FFE0B2"/>
+          </a:solidFill>
+          <a:ln w="25400">
+            <a:solidFill>
+              <a:srgbClr val="FFFFFF"/>
+            </a:solidFill>
+          </a:ln>
+        </p:spPr>
+        <p:style>
+          <a:lnRef idx="1">
+            <a:schemeClr val="accent1"/>
+          </a:lnRef>
+          <a:fillRef idx="3">
+            <a:schemeClr val="accent1"/>
+          </a:fillRef>
+          <a:effectRef idx="2">
+            <a:schemeClr val="accent1"/>
+          </a:effectRef>
+          <a:fontRef idx="minor">
+            <a:schemeClr val="lt1"/>
+          </a:fontRef>
+        </p:style>
+        <p:txBody>
+          <a:bodyPr rtlCol="0" anchor="ctr" wrap="square" tIns="0" bIns="0"/>
+          <a:lstStyle/>
+          <a:p>
+            <a:pPr algn="ctr"/>
+            <a:r>
+              <a:rPr sz="1000" b="1">
+                <a:solidFill>
+                  <a:srgbClr val="FFFFFF"/>
+                </a:solidFill>
+              </a:rPr>
+              <a:t>High</a:t>
+            </a:r>
+          </a:p>
+        </p:txBody>
+      </p:sp>
+      <p:sp>
+        <p:nvSpPr>
+          <p:cNvPr id="25" name="Rectangle 24"/>
+          <p:cNvSpPr/>
+          <p:nvPr/>
+        </p:nvSpPr>
+        <p:spPr>
+          <a:xfrm>
+            <a:off x="8961120" y="2971800"/>
+            <a:ext cx="1508760" cy="594360"/>
+          </a:xfrm>
+          <a:prstGeom prst="rect">
+            <a:avLst/>
+          </a:prstGeom>
+          <a:solidFill>
+            <a:srgbClr val="FFE0B2"/>
+          </a:solidFill>
+          <a:ln w="25400">
+            <a:solidFill>
+              <a:srgbClr val="FFFFFF"/>
+            </a:solidFill>
+          </a:ln>
+        </p:spPr>
+        <p:style>
+          <a:lnRef idx="1">
+            <a:schemeClr val="accent1"/>
+          </a:lnRef>
+          <a:fillRef idx="3">
+            <a:schemeClr val="accent1"/>
+          </a:fillRef>
+          <a:effectRef idx="2">
+            <a:schemeClr val="accent1"/>
+          </a:effectRef>
+          <a:fontRef idx="minor">
+            <a:schemeClr val="lt1"/>
+          </a:fontRef>
+        </p:style>
+        <p:txBody>
+          <a:bodyPr rtlCol="0" anchor="ctr" wrap="square" tIns="0" bIns="0"/>
+          <a:lstStyle/>
+          <a:p>
+            <a:pPr algn="ctr"/>
+            <a:r>
+              <a:rPr sz="1000" b="1">
+                <a:solidFill>
+                  <a:srgbClr val="FFFFFF"/>
+                </a:solidFill>
+              </a:rPr>
+              <a:t>High</a:t>
+            </a:r>
+          </a:p>
+        </p:txBody>
+      </p:sp>
+      <p:sp>
+        <p:nvSpPr>
+          <p:cNvPr id="26" name="TextBox 25"/>
+          <p:cNvSpPr txBox="1"/>
+          <p:nvPr/>
+        </p:nvSpPr>
+        <p:spPr>
+          <a:xfrm>
+            <a:off x="182880" y="3611880"/>
+            <a:ext cx="2560320" cy="640080"/>
+          </a:xfrm>
+          <a:prstGeom prst="rect">
+            <a:avLst/>
+          </a:prstGeom>
+          <a:noFill/>
+        </p:spPr>
+        <p:txBody>
+          <a:bodyPr wrap="square">
+            <a:spAutoFit/>
+          </a:bodyPr>
+          <a:lstStyle/>
+          <a:p>
+            <a:pPr algn="r"/>
+            <a:r>
+              <a:rPr sz="800" b="0" i="0">
+                <a:solidFill>
+                  <a:srgbClr val="424242"/>
+                </a:solidFill>
+              </a:rPr>
+              <a:t>Male Hypogonadism
+(Testosterone)</a:t>
+            </a:r>
+          </a:p>
+        </p:txBody>
+      </p:sp>
+      <p:sp>
+        <p:nvSpPr>
+          <p:cNvPr id="27" name="Rectangle 26"/>
+          <p:cNvSpPr/>
+          <p:nvPr/>
+        </p:nvSpPr>
+        <p:spPr>
+          <a:xfrm>
+            <a:off x="2743200" y="3611880"/>
+            <a:ext cx="1508760" cy="594360"/>
+          </a:xfrm>
+          <a:prstGeom prst="rect">
+            <a:avLst/>
+          </a:prstGeom>
+          <a:solidFill>
+            <a:srgbClr val="EF5350"/>
+          </a:solidFill>
+          <a:ln w="25400">
+            <a:solidFill>
+              <a:srgbClr val="FFFFFF"/>
+            </a:solidFill>
+          </a:ln>
+        </p:spPr>
+        <p:style>
+          <a:lnRef idx="1">
+            <a:schemeClr val="accent1"/>
+          </a:lnRef>
+          <a:fillRef idx="3">
+            <a:schemeClr val="accent1"/>
+          </a:fillRef>
+          <a:effectRef idx="2">
+            <a:schemeClr val="accent1"/>
+          </a:effectRef>
+          <a:fontRef idx="minor">
+            <a:schemeClr val="lt1"/>
+          </a:fontRef>
+        </p:style>
+        <p:txBody>
+          <a:bodyPr rtlCol="0" anchor="ctr" wrap="square" tIns="0" bIns="0"/>
+          <a:lstStyle/>
+          <a:p>
+            <a:pPr algn="ctr"/>
+            <a:r>
+              <a:rPr sz="1000" b="1">
+                <a:solidFill>
+                  <a:srgbClr val="FFFFFF"/>
+                </a:solidFill>
+              </a:rPr>
+              <a:t>V.High</a:t>
+            </a:r>
+          </a:p>
+        </p:txBody>
+      </p:sp>
+      <p:sp>
+        <p:nvSpPr>
+          <p:cNvPr id="28" name="Rectangle 27"/>
+          <p:cNvSpPr/>
+          <p:nvPr/>
+        </p:nvSpPr>
+        <p:spPr>
+          <a:xfrm>
+            <a:off x="4297680" y="3611880"/>
+            <a:ext cx="1508760" cy="594360"/>
+          </a:xfrm>
+          <a:prstGeom prst="rect">
+            <a:avLst/>
+          </a:prstGeom>
+          <a:solidFill>
+            <a:srgbClr val="EF5350"/>
+          </a:solidFill>
+          <a:ln w="25400">
+            <a:solidFill>
+              <a:srgbClr val="FFFFFF"/>
+            </a:solidFill>
+          </a:ln>
+        </p:spPr>
+        <p:style>
+          <a:lnRef idx="1">
+            <a:schemeClr val="accent1"/>
+          </a:lnRef>
+          <a:fillRef idx="3">
+            <a:schemeClr val="accent1"/>
+          </a:fillRef>
+          <a:effectRef idx="2">
+            <a:schemeClr val="accent1"/>
+          </a:effectRef>
+          <a:fontRef idx="minor">
+            <a:schemeClr val="lt1"/>
+          </a:fontRef>
+        </p:style>
+        <p:txBody>
+          <a:bodyPr rtlCol="0" anchor="ctr" wrap="square" tIns="0" bIns="0"/>
+          <a:lstStyle/>
+          <a:p>
+            <a:pPr algn="ctr"/>
+            <a:r>
+              <a:rPr sz="1000" b="1">
+                <a:solidFill>
+                  <a:srgbClr val="FFFFFF"/>
+                </a:solidFill>
+              </a:rPr>
+              <a:t>V.High</a:t>
+            </a:r>
+          </a:p>
+        </p:txBody>
+      </p:sp>
+      <p:sp>
+        <p:nvSpPr>
+          <p:cNvPr id="29" name="Rectangle 28"/>
+          <p:cNvSpPr/>
+          <p:nvPr/>
+        </p:nvSpPr>
+        <p:spPr>
+          <a:xfrm>
+            <a:off x="5852160" y="3611880"/>
+            <a:ext cx="1508760" cy="594360"/>
+          </a:xfrm>
+          <a:prstGeom prst="rect">
+            <a:avLst/>
+          </a:prstGeom>
+          <a:solidFill>
+            <a:srgbClr val="FFE0B2"/>
+          </a:solidFill>
+          <a:ln w="25400">
+            <a:solidFill>
+              <a:srgbClr val="FFFFFF"/>
+            </a:solidFill>
+          </a:ln>
+        </p:spPr>
+        <p:style>
+          <a:lnRef idx="1">
+            <a:schemeClr val="accent1"/>
+          </a:lnRef>
+          <a:fillRef idx="3">
+            <a:schemeClr val="accent1"/>
+          </a:fillRef>
+          <a:effectRef idx="2">
+            <a:schemeClr val="accent1"/>
+          </a:effectRef>
+          <a:fontRef idx="minor">
+            <a:schemeClr val="lt1"/>
+          </a:fontRef>
+        </p:style>
+        <p:txBody>
+          <a:bodyPr rtlCol="0" anchor="ctr" wrap="square" tIns="0" bIns="0"/>
+          <a:lstStyle/>
+          <a:p>
+            <a:pPr algn="ctr"/>
+            <a:r>
+              <a:rPr sz="1000" b="1">
+                <a:solidFill>
+                  <a:srgbClr val="FFFFFF"/>
+                </a:solidFill>
+              </a:rPr>
+              <a:t>High</a:t>
+            </a:r>
+          </a:p>
+        </p:txBody>
+      </p:sp>
+      <p:sp>
+        <p:nvSpPr>
+          <p:cNvPr id="30" name="Rectangle 29"/>
+          <p:cNvSpPr/>
+          <p:nvPr/>
+        </p:nvSpPr>
+        <p:spPr>
+          <a:xfrm>
+            <a:off x="7406640" y="3611880"/>
+            <a:ext cx="1508760" cy="594360"/>
+          </a:xfrm>
+          <a:prstGeom prst="rect">
+            <a:avLst/>
+          </a:prstGeom>
+          <a:solidFill>
+            <a:srgbClr val="EF5350"/>
+          </a:solidFill>
+          <a:ln w="25400">
+            <a:solidFill>
+              <a:srgbClr val="FFFFFF"/>
+            </a:solidFill>
+          </a:ln>
+        </p:spPr>
+        <p:style>
+          <a:lnRef idx="1">
+            <a:schemeClr val="accent1"/>
+          </a:lnRef>
+          <a:fillRef idx="3">
+            <a:schemeClr val="accent1"/>
+          </a:fillRef>
+          <a:effectRef idx="2">
+            <a:schemeClr val="accent1"/>
+          </a:effectRef>
+          <a:fontRef idx="minor">
+            <a:schemeClr val="lt1"/>
+          </a:fontRef>
+        </p:style>
+        <p:txBody>
+          <a:bodyPr rtlCol="0" anchor="ctr" wrap="square" tIns="0" bIns="0"/>
+          <a:lstStyle/>
+          <a:p>
+            <a:pPr algn="ctr"/>
+            <a:r>
+              <a:rPr sz="1000" b="1">
+                <a:solidFill>
+                  <a:srgbClr val="FFFFFF"/>
+                </a:solidFill>
+              </a:rPr>
+              <a:t>V.High</a:t>
+            </a:r>
+          </a:p>
+        </p:txBody>
+      </p:sp>
+      <p:sp>
+        <p:nvSpPr>
+          <p:cNvPr id="31" name="Rectangle 30"/>
+          <p:cNvSpPr/>
+          <p:nvPr/>
+        </p:nvSpPr>
+        <p:spPr>
+          <a:xfrm>
+            <a:off x="8961120" y="3611880"/>
+            <a:ext cx="1508760" cy="594360"/>
+          </a:xfrm>
+          <a:prstGeom prst="rect">
+            <a:avLst/>
+          </a:prstGeom>
+          <a:solidFill>
+            <a:srgbClr val="C8E6C9"/>
+          </a:solidFill>
+          <a:ln w="25400">
+            <a:solidFill>
+              <a:srgbClr val="FFFFFF"/>
+            </a:solidFill>
+          </a:ln>
+        </p:spPr>
+        <p:style>
+          <a:lnRef idx="1">
+            <a:schemeClr val="accent1"/>
+          </a:lnRef>
+          <a:fillRef idx="3">
+            <a:schemeClr val="accent1"/>
+          </a:fillRef>
+          <a:effectRef idx="2">
+            <a:schemeClr val="accent1"/>
+          </a:effectRef>
+          <a:fontRef idx="minor">
+            <a:schemeClr val="lt1"/>
+          </a:fontRef>
+        </p:style>
+        <p:txBody>
+          <a:bodyPr rtlCol="0" anchor="ctr" wrap="square" tIns="0" bIns="0"/>
+          <a:lstStyle/>
+          <a:p>
+            <a:pPr algn="ctr"/>
+            <a:r>
+              <a:rPr sz="1000" b="1">
+                <a:solidFill>
+                  <a:srgbClr val="424242"/>
+                </a:solidFill>
+              </a:rPr>
+              <a:t>Low</a:t>
+            </a:r>
+          </a:p>
+        </p:txBody>
+      </p:sp>
+      <p:sp>
+        <p:nvSpPr>
+          <p:cNvPr id="32" name="TextBox 31"/>
+          <p:cNvSpPr txBox="1"/>
+          <p:nvPr/>
+        </p:nvSpPr>
+        <p:spPr>
+          <a:xfrm>
+            <a:off x="182880" y="4251960"/>
+            <a:ext cx="2560320" cy="640080"/>
+          </a:xfrm>
+          <a:prstGeom prst="rect">
+            <a:avLst/>
+          </a:prstGeom>
+          <a:noFill/>
+        </p:spPr>
+        <p:txBody>
+          <a:bodyPr wrap="square">
+            <a:spAutoFit/>
+          </a:bodyPr>
+          <a:lstStyle/>
+          <a:p>
+            <a:pPr algn="r"/>
+            <a:r>
+              <a:rPr sz="800" b="0" i="0">
+                <a:solidFill>
+                  <a:srgbClr val="424242"/>
+                </a:solidFill>
+              </a:rPr>
+              <a:t>Glucocorticoids
+(Intra-articular)</a:t>
+            </a:r>
+          </a:p>
+        </p:txBody>
+      </p:sp>
+      <p:sp>
+        <p:nvSpPr>
+          <p:cNvPr id="33" name="Rectangle 32"/>
+          <p:cNvSpPr/>
+          <p:nvPr/>
+        </p:nvSpPr>
+        <p:spPr>
+          <a:xfrm>
+            <a:off x="2743200" y="4251960"/>
+            <a:ext cx="1508760" cy="594360"/>
+          </a:xfrm>
+          <a:prstGeom prst="rect">
+            <a:avLst/>
+          </a:prstGeom>
+          <a:solidFill>
+            <a:srgbClr val="FFE0B2"/>
+          </a:solidFill>
+          <a:ln w="25400">
+            <a:solidFill>
+              <a:srgbClr val="FFFFFF"/>
+            </a:solidFill>
+          </a:ln>
+        </p:spPr>
+        <p:style>
+          <a:lnRef idx="1">
+            <a:schemeClr val="accent1"/>
+          </a:lnRef>
+          <a:fillRef idx="3">
+            <a:schemeClr val="accent1"/>
+          </a:fillRef>
+          <a:effectRef idx="2">
+            <a:schemeClr val="accent1"/>
+          </a:effectRef>
+          <a:fontRef idx="minor">
+            <a:schemeClr val="lt1"/>
+          </a:fontRef>
+        </p:style>
+        <p:txBody>
+          <a:bodyPr rtlCol="0" anchor="ctr" wrap="square" tIns="0" bIns="0"/>
+          <a:lstStyle/>
+          <a:p>
+            <a:pPr algn="ctr"/>
+            <a:r>
+              <a:rPr sz="1000" b="1">
+                <a:solidFill>
+                  <a:srgbClr val="FFFFFF"/>
+                </a:solidFill>
+              </a:rPr>
+              <a:t>High</a:t>
+            </a:r>
+          </a:p>
+        </p:txBody>
+      </p:sp>
+      <p:sp>
+        <p:nvSpPr>
+          <p:cNvPr id="34" name="Rectangle 33"/>
+          <p:cNvSpPr/>
+          <p:nvPr/>
+        </p:nvSpPr>
+        <p:spPr>
+          <a:xfrm>
+            <a:off x="4297680" y="4251960"/>
+            <a:ext cx="1508760" cy="594360"/>
+          </a:xfrm>
+          <a:prstGeom prst="rect">
+            <a:avLst/>
+          </a:prstGeom>
+          <a:solidFill>
+            <a:srgbClr val="FFF9C4"/>
+          </a:solidFill>
+          <a:ln w="25400">
+            <a:solidFill>
+              <a:srgbClr val="FFFFFF"/>
+            </a:solidFill>
+          </a:ln>
+        </p:spPr>
+        <p:style>
+          <a:lnRef idx="1">
+            <a:schemeClr val="accent1"/>
+          </a:lnRef>
+          <a:fillRef idx="3">
+            <a:schemeClr val="accent1"/>
+          </a:fillRef>
+          <a:effectRef idx="2">
+            <a:schemeClr val="accent1"/>
+          </a:effectRef>
+          <a:fontRef idx="minor">
+            <a:schemeClr val="lt1"/>
+          </a:fontRef>
+        </p:style>
+        <p:txBody>
+          <a:bodyPr rtlCol="0" anchor="ctr" wrap="square" tIns="0" bIns="0"/>
+          <a:lstStyle/>
+          <a:p>
+            <a:pPr algn="ctr"/>
+            <a:r>
+              <a:rPr sz="1000" b="1">
+                <a:solidFill>
+                  <a:srgbClr val="424242"/>
+                </a:solidFill>
+              </a:rPr>
+              <a:t>Med</a:t>
+            </a:r>
+          </a:p>
+        </p:txBody>
+      </p:sp>
+      <p:sp>
+        <p:nvSpPr>
+          <p:cNvPr id="35" name="Rectangle 34"/>
+          <p:cNvSpPr/>
+          <p:nvPr/>
+        </p:nvSpPr>
+        <p:spPr>
+          <a:xfrm>
+            <a:off x="5852160" y="4251960"/>
+            <a:ext cx="1508760" cy="594360"/>
+          </a:xfrm>
+          <a:prstGeom prst="rect">
+            <a:avLst/>
+          </a:prstGeom>
+          <a:solidFill>
+            <a:srgbClr val="FFF9C4"/>
+          </a:solidFill>
+          <a:ln w="25400">
+            <a:solidFill>
+              <a:srgbClr val="FFFFFF"/>
+            </a:solidFill>
+          </a:ln>
+        </p:spPr>
+        <p:style>
+          <a:lnRef idx="1">
+            <a:schemeClr val="accent1"/>
+          </a:lnRef>
+          <a:fillRef idx="3">
+            <a:schemeClr val="accent1"/>
+          </a:fillRef>
+          <a:effectRef idx="2">
+            <a:schemeClr val="accent1"/>
+          </a:effectRef>
+          <a:fontRef idx="minor">
+            <a:schemeClr val="lt1"/>
+          </a:fontRef>
+        </p:style>
+        <p:txBody>
+          <a:bodyPr rtlCol="0" anchor="ctr" wrap="square" tIns="0" bIns="0"/>
+          <a:lstStyle/>
+          <a:p>
+            <a:pPr algn="ctr"/>
+            <a:r>
+              <a:rPr sz="1000" b="1">
+                <a:solidFill>
+                  <a:srgbClr val="424242"/>
+                </a:solidFill>
+              </a:rPr>
+              <a:t>Med</a:t>
+            </a:r>
+          </a:p>
+        </p:txBody>
+      </p:sp>
+      <p:sp>
+        <p:nvSpPr>
+          <p:cNvPr id="36" name="Rectangle 35"/>
+          <p:cNvSpPr/>
+          <p:nvPr/>
+        </p:nvSpPr>
+        <p:spPr>
+          <a:xfrm>
+            <a:off x="7406640" y="4251960"/>
+            <a:ext cx="1508760" cy="594360"/>
+          </a:xfrm>
+          <a:prstGeom prst="rect">
+            <a:avLst/>
+          </a:prstGeom>
+          <a:solidFill>
+            <a:srgbClr val="FFE0B2"/>
+          </a:solidFill>
+          <a:ln w="25400">
+            <a:solidFill>
+              <a:srgbClr val="FFFFFF"/>
+            </a:solidFill>
+          </a:ln>
+        </p:spPr>
+        <p:style>
+          <a:lnRef idx="1">
+            <a:schemeClr val="accent1"/>
+          </a:lnRef>
+          <a:fillRef idx="3">
+            <a:schemeClr val="accent1"/>
+          </a:fillRef>
+          <a:effectRef idx="2">
+            <a:schemeClr val="accent1"/>
+          </a:effectRef>
+          <a:fontRef idx="minor">
+            <a:schemeClr val="lt1"/>
+          </a:fontRef>
+        </p:style>
+        <p:txBody>
+          <a:bodyPr rtlCol="0" anchor="ctr" wrap="square" tIns="0" bIns="0"/>
+          <a:lstStyle/>
+          <a:p>
+            <a:pPr algn="ctr"/>
+            <a:r>
+              <a:rPr sz="1000" b="1">
+                <a:solidFill>
+                  <a:srgbClr val="FFFFFF"/>
+                </a:solidFill>
+              </a:rPr>
+              <a:t>High</a:t>
+            </a:r>
+          </a:p>
+        </p:txBody>
+      </p:sp>
+      <p:sp>
+        <p:nvSpPr>
+          <p:cNvPr id="37" name="Rectangle 36"/>
+          <p:cNvSpPr/>
+          <p:nvPr/>
+        </p:nvSpPr>
+        <p:spPr>
+          <a:xfrm>
+            <a:off x="8961120" y="4251960"/>
+            <a:ext cx="1508760" cy="594360"/>
+          </a:xfrm>
+          <a:prstGeom prst="rect">
+            <a:avLst/>
+          </a:prstGeom>
+          <a:solidFill>
+            <a:srgbClr val="FFE0B2"/>
+          </a:solidFill>
+          <a:ln w="25400">
+            <a:solidFill>
+              <a:srgbClr val="FFFFFF"/>
+            </a:solidFill>
+          </a:ln>
+        </p:spPr>
+        <p:style>
+          <a:lnRef idx="1">
+            <a:schemeClr val="accent1"/>
+          </a:lnRef>
+          <a:fillRef idx="3">
+            <a:schemeClr val="accent1"/>
+          </a:fillRef>
+          <a:effectRef idx="2">
+            <a:schemeClr val="accent1"/>
+          </a:effectRef>
+          <a:fontRef idx="minor">
+            <a:schemeClr val="lt1"/>
+          </a:fontRef>
+        </p:style>
+        <p:txBody>
+          <a:bodyPr rtlCol="0" anchor="ctr" wrap="square" tIns="0" bIns="0"/>
+          <a:lstStyle/>
+          <a:p>
+            <a:pPr algn="ctr"/>
+            <a:r>
+              <a:rPr sz="1000" b="1">
+                <a:solidFill>
+                  <a:srgbClr val="FFFFFF"/>
+                </a:solidFill>
+              </a:rPr>
+              <a:t>High</a:t>
+            </a:r>
+          </a:p>
+        </p:txBody>
+      </p:sp>
+      <p:sp>
+        <p:nvSpPr>
+          <p:cNvPr id="38" name="TextBox 37"/>
+          <p:cNvSpPr txBox="1"/>
+          <p:nvPr/>
+        </p:nvSpPr>
+        <p:spPr>
+          <a:xfrm>
+            <a:off x="182880" y="4892040"/>
+            <a:ext cx="2560320" cy="640080"/>
+          </a:xfrm>
+          <a:prstGeom prst="rect">
+            <a:avLst/>
+          </a:prstGeom>
+          <a:noFill/>
+        </p:spPr>
+        <p:txBody>
+          <a:bodyPr wrap="square">
+            <a:spAutoFit/>
+          </a:bodyPr>
+          <a:lstStyle/>
+          <a:p>
+            <a:pPr algn="r"/>
+            <a:r>
+              <a:rPr sz="800" b="0" i="0">
+                <a:solidFill>
+                  <a:srgbClr val="424242"/>
+                </a:solidFill>
+              </a:rPr>
+              <a:t>Cardiovascular
+(Diuretics/BB)</a:t>
+            </a:r>
+          </a:p>
+        </p:txBody>
+      </p:sp>
+      <p:sp>
+        <p:nvSpPr>
+          <p:cNvPr id="39" name="Rectangle 38"/>
+          <p:cNvSpPr/>
+          <p:nvPr/>
+        </p:nvSpPr>
+        <p:spPr>
+          <a:xfrm>
+            <a:off x="2743200" y="4892040"/>
+            <a:ext cx="1508760" cy="594360"/>
+          </a:xfrm>
+          <a:prstGeom prst="rect">
+            <a:avLst/>
+          </a:prstGeom>
+          <a:solidFill>
+            <a:srgbClr val="FFE0B2"/>
+          </a:solidFill>
+          <a:ln w="25400">
+            <a:solidFill>
+              <a:srgbClr val="FFFFFF"/>
+            </a:solidFill>
+          </a:ln>
+        </p:spPr>
+        <p:style>
+          <a:lnRef idx="1">
+            <a:schemeClr val="accent1"/>
+          </a:lnRef>
+          <a:fillRef idx="3">
+            <a:schemeClr val="accent1"/>
+          </a:fillRef>
+          <a:effectRef idx="2">
+            <a:schemeClr val="accent1"/>
+          </a:effectRef>
+          <a:fontRef idx="minor">
+            <a:schemeClr val="lt1"/>
+          </a:fontRef>
+        </p:style>
+        <p:txBody>
+          <a:bodyPr rtlCol="0" anchor="ctr" wrap="square" tIns="0" bIns="0"/>
+          <a:lstStyle/>
+          <a:p>
+            <a:pPr algn="ctr"/>
+            <a:r>
+              <a:rPr sz="1000" b="1">
+                <a:solidFill>
+                  <a:srgbClr val="FFFFFF"/>
+                </a:solidFill>
+              </a:rPr>
+              <a:t>High</a:t>
+            </a:r>
+          </a:p>
+        </p:txBody>
+      </p:sp>
+      <p:sp>
+        <p:nvSpPr>
+          <p:cNvPr id="40" name="Rectangle 39"/>
+          <p:cNvSpPr/>
+          <p:nvPr/>
+        </p:nvSpPr>
+        <p:spPr>
+          <a:xfrm>
+            <a:off x="4297680" y="4892040"/>
+            <a:ext cx="1508760" cy="594360"/>
+          </a:xfrm>
+          <a:prstGeom prst="rect">
+            <a:avLst/>
+          </a:prstGeom>
+          <a:solidFill>
+            <a:srgbClr val="FFE0B2"/>
+          </a:solidFill>
+          <a:ln w="25400">
+            <a:solidFill>
+              <a:srgbClr val="FFFFFF"/>
+            </a:solidFill>
+          </a:ln>
+        </p:spPr>
+        <p:style>
+          <a:lnRef idx="1">
+            <a:schemeClr val="accent1"/>
+          </a:lnRef>
+          <a:fillRef idx="3">
+            <a:schemeClr val="accent1"/>
+          </a:fillRef>
+          <a:effectRef idx="2">
+            <a:schemeClr val="accent1"/>
+          </a:effectRef>
+          <a:fontRef idx="minor">
+            <a:schemeClr val="lt1"/>
+          </a:fontRef>
+        </p:style>
+        <p:txBody>
+          <a:bodyPr rtlCol="0" anchor="ctr" wrap="square" tIns="0" bIns="0"/>
+          <a:lstStyle/>
+          <a:p>
+            <a:pPr algn="ctr"/>
+            <a:r>
+              <a:rPr sz="1000" b="1">
+                <a:solidFill>
+                  <a:srgbClr val="FFFFFF"/>
+                </a:solidFill>
+              </a:rPr>
+              <a:t>High</a:t>
+            </a:r>
+          </a:p>
+        </p:txBody>
+      </p:sp>
+      <p:sp>
+        <p:nvSpPr>
+          <p:cNvPr id="41" name="Rectangle 40"/>
+          <p:cNvSpPr/>
+          <p:nvPr/>
+        </p:nvSpPr>
+        <p:spPr>
+          <a:xfrm>
+            <a:off x="5852160" y="4892040"/>
+            <a:ext cx="1508760" cy="594360"/>
+          </a:xfrm>
+          <a:prstGeom prst="rect">
+            <a:avLst/>
+          </a:prstGeom>
+          <a:solidFill>
+            <a:srgbClr val="FFE0B2"/>
+          </a:solidFill>
+          <a:ln w="25400">
+            <a:solidFill>
+              <a:srgbClr val="FFFFFF"/>
+            </a:solidFill>
+          </a:ln>
+        </p:spPr>
+        <p:style>
+          <a:lnRef idx="1">
+            <a:schemeClr val="accent1"/>
+          </a:lnRef>
+          <a:fillRef idx="3">
+            <a:schemeClr val="accent1"/>
+          </a:fillRef>
+          <a:effectRef idx="2">
+            <a:schemeClr val="accent1"/>
+          </a:effectRef>
+          <a:fontRef idx="minor">
+            <a:schemeClr val="lt1"/>
+          </a:fontRef>
+        </p:style>
+        <p:txBody>
+          <a:bodyPr rtlCol="0" anchor="ctr" wrap="square" tIns="0" bIns="0"/>
+          <a:lstStyle/>
+          <a:p>
+            <a:pPr algn="ctr"/>
+            <a:r>
+              <a:rPr sz="1000" b="1">
+                <a:solidFill>
+                  <a:srgbClr val="FFFFFF"/>
+                </a:solidFill>
+              </a:rPr>
+              <a:t>High</a:t>
+            </a:r>
+          </a:p>
+        </p:txBody>
+      </p:sp>
+      <p:sp>
+        <p:nvSpPr>
+          <p:cNvPr id="42" name="Rectangle 41"/>
+          <p:cNvSpPr/>
+          <p:nvPr/>
+        </p:nvSpPr>
+        <p:spPr>
+          <a:xfrm>
+            <a:off x="7406640" y="4892040"/>
+            <a:ext cx="1508760" cy="594360"/>
+          </a:xfrm>
+          <a:prstGeom prst="rect">
+            <a:avLst/>
+          </a:prstGeom>
+          <a:solidFill>
+            <a:srgbClr val="FFE0B2"/>
+          </a:solidFill>
+          <a:ln w="25400">
+            <a:solidFill>
+              <a:srgbClr val="FFFFFF"/>
+            </a:solidFill>
+          </a:ln>
+        </p:spPr>
+        <p:style>
+          <a:lnRef idx="1">
+            <a:schemeClr val="accent1"/>
+          </a:lnRef>
+          <a:fillRef idx="3">
+            <a:schemeClr val="accent1"/>
+          </a:fillRef>
+          <a:effectRef idx="2">
+            <a:schemeClr val="accent1"/>
+          </a:effectRef>
+          <a:fontRef idx="minor">
+            <a:schemeClr val="lt1"/>
+          </a:fontRef>
+        </p:style>
+        <p:txBody>
+          <a:bodyPr rtlCol="0" anchor="ctr" wrap="square" tIns="0" bIns="0"/>
+          <a:lstStyle/>
+          <a:p>
+            <a:pPr algn="ctr"/>
+            <a:r>
+              <a:rPr sz="1000" b="1">
+                <a:solidFill>
+                  <a:srgbClr val="FFFFFF"/>
+                </a:solidFill>
+              </a:rPr>
+              <a:t>High</a:t>
+            </a:r>
+          </a:p>
+        </p:txBody>
+      </p:sp>
+      <p:sp>
+        <p:nvSpPr>
+          <p:cNvPr id="43" name="Rectangle 42"/>
+          <p:cNvSpPr/>
+          <p:nvPr/>
+        </p:nvSpPr>
+        <p:spPr>
+          <a:xfrm>
+            <a:off x="8961120" y="4892040"/>
+            <a:ext cx="1508760" cy="594360"/>
+          </a:xfrm>
+          <a:prstGeom prst="rect">
+            <a:avLst/>
+          </a:prstGeom>
+          <a:solidFill>
+            <a:srgbClr val="FFF9C4"/>
+          </a:solidFill>
+          <a:ln w="25400">
+            <a:solidFill>
+              <a:srgbClr val="FFFFFF"/>
+            </a:solidFill>
+          </a:ln>
+        </p:spPr>
+        <p:style>
+          <a:lnRef idx="1">
+            <a:schemeClr val="accent1"/>
+          </a:lnRef>
+          <a:fillRef idx="3">
+            <a:schemeClr val="accent1"/>
+          </a:fillRef>
+          <a:effectRef idx="2">
+            <a:schemeClr val="accent1"/>
+          </a:effectRef>
+          <a:fontRef idx="minor">
+            <a:schemeClr val="lt1"/>
+          </a:fontRef>
+        </p:style>
+        <p:txBody>
+          <a:bodyPr rtlCol="0" anchor="ctr" wrap="square" tIns="0" bIns="0"/>
+          <a:lstStyle/>
+          <a:p>
+            <a:pPr algn="ctr"/>
+            <a:r>
+              <a:rPr sz="1000" b="1">
+                <a:solidFill>
+                  <a:srgbClr val="424242"/>
+                </a:solidFill>
+              </a:rPr>
+              <a:t>Med</a:t>
+            </a:r>
+          </a:p>
+        </p:txBody>
+      </p:sp>
+      <p:sp>
+        <p:nvSpPr>
+          <p:cNvPr id="44" name="TextBox 43"/>
+          <p:cNvSpPr txBox="1"/>
+          <p:nvPr/>
+        </p:nvSpPr>
+        <p:spPr>
+          <a:xfrm>
+            <a:off x="182880" y="5532120"/>
+            <a:ext cx="2560320" cy="640080"/>
+          </a:xfrm>
+          <a:prstGeom prst="rect">
+            <a:avLst/>
+          </a:prstGeom>
+          <a:noFill/>
+        </p:spPr>
+        <p:txBody>
+          <a:bodyPr wrap="square">
+            <a:spAutoFit/>
+          </a:bodyPr>
+          <a:lstStyle/>
+          <a:p>
+            <a:pPr algn="r"/>
+            <a:r>
+              <a:rPr sz="800" b="0" i="0">
+                <a:solidFill>
+                  <a:srgbClr val="424242"/>
+                </a:solidFill>
+              </a:rPr>
+              <a:t>PCOS/Fertility
+(Letrozole/Clomiphene)</a:t>
+            </a:r>
+          </a:p>
+        </p:txBody>
+      </p:sp>
+      <p:sp>
+        <p:nvSpPr>
+          <p:cNvPr id="45" name="Rectangle 44"/>
+          <p:cNvSpPr/>
+          <p:nvPr/>
+        </p:nvSpPr>
+        <p:spPr>
+          <a:xfrm>
+            <a:off x="2743200" y="5532120"/>
+            <a:ext cx="1508760" cy="594360"/>
+          </a:xfrm>
+          <a:prstGeom prst="rect">
+            <a:avLst/>
+          </a:prstGeom>
+          <a:solidFill>
+            <a:srgbClr val="EF5350"/>
+          </a:solidFill>
+          <a:ln w="25400">
+            <a:solidFill>
+              <a:srgbClr val="FFFFFF"/>
+            </a:solidFill>
+          </a:ln>
+        </p:spPr>
+        <p:style>
+          <a:lnRef idx="1">
+            <a:schemeClr val="accent1"/>
+          </a:lnRef>
+          <a:fillRef idx="3">
+            <a:schemeClr val="accent1"/>
+          </a:fillRef>
+          <a:effectRef idx="2">
+            <a:schemeClr val="accent1"/>
+          </a:effectRef>
+          <a:fontRef idx="minor">
+            <a:schemeClr val="lt1"/>
+          </a:fontRef>
+        </p:style>
+        <p:txBody>
+          <a:bodyPr rtlCol="0" anchor="ctr" wrap="square" tIns="0" bIns="0"/>
+          <a:lstStyle/>
+          <a:p>
+            <a:pPr algn="ctr"/>
+            <a:r>
+              <a:rPr sz="1000" b="1">
+                <a:solidFill>
+                  <a:srgbClr val="FFFFFF"/>
+                </a:solidFill>
+              </a:rPr>
+              <a:t>V.High</a:t>
+            </a:r>
+          </a:p>
+        </p:txBody>
+      </p:sp>
+      <p:sp>
+        <p:nvSpPr>
+          <p:cNvPr id="46" name="Rectangle 45"/>
+          <p:cNvSpPr/>
+          <p:nvPr/>
+        </p:nvSpPr>
+        <p:spPr>
+          <a:xfrm>
+            <a:off x="4297680" y="5532120"/>
+            <a:ext cx="1508760" cy="594360"/>
+          </a:xfrm>
+          <a:prstGeom prst="rect">
+            <a:avLst/>
+          </a:prstGeom>
+          <a:solidFill>
+            <a:srgbClr val="FFE0B2"/>
+          </a:solidFill>
+          <a:ln w="25400">
+            <a:solidFill>
+              <a:srgbClr val="FFFFFF"/>
+            </a:solidFill>
+          </a:ln>
+        </p:spPr>
+        <p:style>
+          <a:lnRef idx="1">
+            <a:schemeClr val="accent1"/>
+          </a:lnRef>
+          <a:fillRef idx="3">
+            <a:schemeClr val="accent1"/>
+          </a:fillRef>
+          <a:effectRef idx="2">
+            <a:schemeClr val="accent1"/>
+          </a:effectRef>
+          <a:fontRef idx="minor">
+            <a:schemeClr val="lt1"/>
+          </a:fontRef>
+        </p:style>
+        <p:txBody>
+          <a:bodyPr rtlCol="0" anchor="ctr" wrap="square" tIns="0" bIns="0"/>
+          <a:lstStyle/>
+          <a:p>
+            <a:pPr algn="ctr"/>
+            <a:r>
+              <a:rPr sz="1000" b="1">
+                <a:solidFill>
+                  <a:srgbClr val="FFFFFF"/>
+                </a:solidFill>
+              </a:rPr>
+              <a:t>High</a:t>
+            </a:r>
+          </a:p>
+        </p:txBody>
+      </p:sp>
+      <p:sp>
+        <p:nvSpPr>
+          <p:cNvPr id="47" name="Rectangle 46"/>
+          <p:cNvSpPr/>
+          <p:nvPr/>
+        </p:nvSpPr>
+        <p:spPr>
+          <a:xfrm>
+            <a:off x="5852160" y="5532120"/>
+            <a:ext cx="1508760" cy="594360"/>
+          </a:xfrm>
+          <a:prstGeom prst="rect">
+            <a:avLst/>
+          </a:prstGeom>
+          <a:solidFill>
+            <a:srgbClr val="FFF9C4"/>
+          </a:solidFill>
+          <a:ln w="25400">
+            <a:solidFill>
+              <a:srgbClr val="FFFFFF"/>
+            </a:solidFill>
+          </a:ln>
+        </p:spPr>
+        <p:style>
+          <a:lnRef idx="1">
+            <a:schemeClr val="accent1"/>
+          </a:lnRef>
+          <a:fillRef idx="3">
+            <a:schemeClr val="accent1"/>
+          </a:fillRef>
+          <a:effectRef idx="2">
+            <a:schemeClr val="accent1"/>
+          </a:effectRef>
+          <a:fontRef idx="minor">
+            <a:schemeClr val="lt1"/>
+          </a:fontRef>
+        </p:style>
+        <p:txBody>
+          <a:bodyPr rtlCol="0" anchor="ctr" wrap="square" tIns="0" bIns="0"/>
+          <a:lstStyle/>
+          <a:p>
+            <a:pPr algn="ctr"/>
+            <a:r>
+              <a:rPr sz="1000" b="1">
+                <a:solidFill>
+                  <a:srgbClr val="424242"/>
+                </a:solidFill>
+              </a:rPr>
+              <a:t>Med</a:t>
+            </a:r>
+          </a:p>
+        </p:txBody>
+      </p:sp>
+      <p:sp>
+        <p:nvSpPr>
+          <p:cNvPr id="48" name="Rectangle 47"/>
+          <p:cNvSpPr/>
+          <p:nvPr/>
+        </p:nvSpPr>
+        <p:spPr>
+          <a:xfrm>
+            <a:off x="7406640" y="5532120"/>
+            <a:ext cx="1508760" cy="594360"/>
+          </a:xfrm>
+          <a:prstGeom prst="rect">
+            <a:avLst/>
+          </a:prstGeom>
+          <a:solidFill>
+            <a:srgbClr val="FFE0B2"/>
+          </a:solidFill>
+          <a:ln w="25400">
+            <a:solidFill>
+              <a:srgbClr val="FFFFFF"/>
+            </a:solidFill>
+          </a:ln>
+        </p:spPr>
+        <p:style>
+          <a:lnRef idx="1">
+            <a:schemeClr val="accent1"/>
+          </a:lnRef>
+          <a:fillRef idx="3">
+            <a:schemeClr val="accent1"/>
+          </a:fillRef>
+          <a:effectRef idx="2">
+            <a:schemeClr val="accent1"/>
+          </a:effectRef>
+          <a:fontRef idx="minor">
+            <a:schemeClr val="lt1"/>
+          </a:fontRef>
+        </p:style>
+        <p:txBody>
+          <a:bodyPr rtlCol="0" anchor="ctr" wrap="square" tIns="0" bIns="0"/>
+          <a:lstStyle/>
+          <a:p>
+            <a:pPr algn="ctr"/>
+            <a:r>
+              <a:rPr sz="1000" b="1">
+                <a:solidFill>
+                  <a:srgbClr val="FFFFFF"/>
+                </a:solidFill>
+              </a:rPr>
+              <a:t>High</a:t>
+            </a:r>
+          </a:p>
+        </p:txBody>
+      </p:sp>
+      <p:sp>
+        <p:nvSpPr>
+          <p:cNvPr id="49" name="Rectangle 48"/>
+          <p:cNvSpPr/>
+          <p:nvPr/>
+        </p:nvSpPr>
+        <p:spPr>
+          <a:xfrm>
+            <a:off x="8961120" y="5532120"/>
+            <a:ext cx="1508760" cy="594360"/>
+          </a:xfrm>
+          <a:prstGeom prst="rect">
+            <a:avLst/>
+          </a:prstGeom>
+          <a:solidFill>
+            <a:srgbClr val="C8E6C9"/>
+          </a:solidFill>
+          <a:ln w="25400">
+            <a:solidFill>
+              <a:srgbClr val="FFFFFF"/>
+            </a:solidFill>
+          </a:ln>
+        </p:spPr>
+        <p:style>
+          <a:lnRef idx="1">
+            <a:schemeClr val="accent1"/>
+          </a:lnRef>
+          <a:fillRef idx="3">
+            <a:schemeClr val="accent1"/>
+          </a:fillRef>
+          <a:effectRef idx="2">
+            <a:schemeClr val="accent1"/>
+          </a:effectRef>
+          <a:fontRef idx="minor">
+            <a:schemeClr val="lt1"/>
+          </a:fontRef>
+        </p:style>
+        <p:txBody>
+          <a:bodyPr rtlCol="0" anchor="ctr" wrap="square" tIns="0" bIns="0"/>
+          <a:lstStyle/>
+          <a:p>
+            <a:pPr algn="ctr"/>
+            <a:r>
+              <a:rPr sz="1000" b="1">
+                <a:solidFill>
+                  <a:srgbClr val="424242"/>
+                </a:solidFill>
+              </a:rPr>
+              <a:t>Low</a:t>
+            </a:r>
+          </a:p>
+        </p:txBody>
+      </p:sp>
+      <p:sp>
+        <p:nvSpPr>
+          <p:cNvPr id="50" name="TextBox 49"/>
+          <p:cNvSpPr txBox="1"/>
+          <p:nvPr/>
+        </p:nvSpPr>
+        <p:spPr>
+          <a:xfrm>
+            <a:off x="1371600" y="5760720"/>
+            <a:ext cx="1828800" cy="320040"/>
+          </a:xfrm>
+          <a:prstGeom prst="rect">
+            <a:avLst/>
+          </a:prstGeom>
+          <a:noFill/>
+        </p:spPr>
+        <p:txBody>
+          <a:bodyPr wrap="square">
+            <a:spAutoFit/>
+          </a:bodyPr>
+          <a:lstStyle/>
+          <a:p>
+            <a:pPr algn="r"/>
+            <a:r>
+              <a:rPr sz="900" b="1" i="0">
+                <a:solidFill>
+                  <a:srgbClr val="424242"/>
+                </a:solidFill>
+              </a:rPr>
+              <a:t>Gap Severity:</a:t>
+            </a:r>
+          </a:p>
+        </p:txBody>
+      </p:sp>
+      <p:sp>
+        <p:nvSpPr>
+          <p:cNvPr id="51" name="Rectangle 50"/>
+          <p:cNvSpPr/>
+          <p:nvPr/>
+        </p:nvSpPr>
+        <p:spPr>
+          <a:xfrm>
+            <a:off x="3200400" y="5760720"/>
+            <a:ext cx="1371600" cy="320040"/>
+          </a:xfrm>
+          <a:prstGeom prst="rect">
+            <a:avLst/>
+          </a:prstGeom>
+          <a:solidFill>
+            <a:srgbClr val="E8F5E9"/>
+          </a:solidFill>
+          <a:ln w="12700">
+            <a:solidFill>
+              <a:srgbClr val="FFFFFF"/>
+            </a:solidFill>
+          </a:ln>
+        </p:spPr>
+        <p:style>
+          <a:lnRef idx="1">
+            <a:schemeClr val="accent1"/>
+          </a:lnRef>
+          <a:fillRef idx="3">
+            <a:schemeClr val="accent1"/>
+          </a:fillRef>
+          <a:effectRef idx="2">
+            <a:schemeClr val="accent1"/>
+          </a:effectRef>
+          <a:fontRef idx="minor">
+            <a:schemeClr val="lt1"/>
+          </a:fontRef>
+        </p:style>
+        <p:txBody>
+          <a:bodyPr rtlCol="0" anchor="ctr"/>
+          <a:lstStyle/>
+          <a:p>
+            <a:pPr algn="ctr"/>
+            <a:r>
+              <a:rPr sz="800" b="1">
+                <a:solidFill>
+                  <a:srgbClr val="424242"/>
+                </a:solidFill>
+              </a:rPr>
+              <a:t>None</a:t>
+            </a:r>
+          </a:p>
+        </p:txBody>
+      </p:sp>
+      <p:sp>
+        <p:nvSpPr>
+          <p:cNvPr id="52" name="Rectangle 51"/>
+          <p:cNvSpPr/>
+          <p:nvPr/>
+        </p:nvSpPr>
+        <p:spPr>
+          <a:xfrm>
+            <a:off x="4572000" y="5760720"/>
+            <a:ext cx="1371600" cy="320040"/>
+          </a:xfrm>
+          <a:prstGeom prst="rect">
+            <a:avLst/>
+          </a:prstGeom>
+          <a:solidFill>
+            <a:srgbClr val="C8E6C9"/>
+          </a:solidFill>
+          <a:ln w="12700">
+            <a:solidFill>
+              <a:srgbClr val="FFFFFF"/>
+            </a:solidFill>
+          </a:ln>
+        </p:spPr>
+        <p:style>
+          <a:lnRef idx="1">
+            <a:schemeClr val="accent1"/>
+          </a:lnRef>
+          <a:fillRef idx="3">
+            <a:schemeClr val="accent1"/>
+          </a:fillRef>
+          <a:effectRef idx="2">
+            <a:schemeClr val="accent1"/>
+          </a:effectRef>
+          <a:fontRef idx="minor">
+            <a:schemeClr val="lt1"/>
+          </a:fontRef>
+        </p:style>
+        <p:txBody>
+          <a:bodyPr rtlCol="0" anchor="ctr"/>
+          <a:lstStyle/>
+          <a:p>
+            <a:pPr algn="ctr"/>
+            <a:r>
+              <a:rPr sz="800" b="1">
+                <a:solidFill>
+                  <a:srgbClr val="424242"/>
+                </a:solidFill>
+              </a:rPr>
+              <a:t>Low</a:t>
+            </a:r>
+          </a:p>
+        </p:txBody>
+      </p:sp>
+      <p:sp>
+        <p:nvSpPr>
+          <p:cNvPr id="53" name="Rectangle 52"/>
+          <p:cNvSpPr/>
+          <p:nvPr/>
+        </p:nvSpPr>
+        <p:spPr>
+          <a:xfrm>
+            <a:off x="5943600" y="5760720"/>
+            <a:ext cx="1371600" cy="320040"/>
+          </a:xfrm>
+          <a:prstGeom prst="rect">
+            <a:avLst/>
+          </a:prstGeom>
+          <a:solidFill>
+            <a:srgbClr val="FFF9C4"/>
+          </a:solidFill>
+          <a:ln w="12700">
+            <a:solidFill>
+              <a:srgbClr val="FFFFFF"/>
+            </a:solidFill>
+          </a:ln>
+        </p:spPr>
+        <p:style>
+          <a:lnRef idx="1">
+            <a:schemeClr val="accent1"/>
+          </a:lnRef>
+          <a:fillRef idx="3">
+            <a:schemeClr val="accent1"/>
+          </a:fillRef>
+          <a:effectRef idx="2">
+            <a:schemeClr val="accent1"/>
+          </a:effectRef>
+          <a:fontRef idx="minor">
+            <a:schemeClr val="lt1"/>
+          </a:fontRef>
+        </p:style>
+        <p:txBody>
+          <a:bodyPr rtlCol="0" anchor="ctr"/>
+          <a:lstStyle/>
+          <a:p>
+            <a:pPr algn="ctr"/>
+            <a:r>
+              <a:rPr sz="800" b="1">
+                <a:solidFill>
+                  <a:srgbClr val="424242"/>
+                </a:solidFill>
+              </a:rPr>
+              <a:t>Medium</a:t>
+            </a:r>
+          </a:p>
+        </p:txBody>
+      </p:sp>
+      <p:sp>
+        <p:nvSpPr>
+          <p:cNvPr id="54" name="Rectangle 53"/>
+          <p:cNvSpPr/>
+          <p:nvPr/>
+        </p:nvSpPr>
+        <p:spPr>
+          <a:xfrm>
+            <a:off x="7315200" y="5760720"/>
+            <a:ext cx="1371600" cy="320040"/>
+          </a:xfrm>
+          <a:prstGeom prst="rect">
+            <a:avLst/>
+          </a:prstGeom>
+          <a:solidFill>
+            <a:srgbClr val="FFE0B2"/>
+          </a:solidFill>
+          <a:ln w="12700">
+            <a:solidFill>
+              <a:srgbClr val="FFFFFF"/>
+            </a:solidFill>
+          </a:ln>
+        </p:spPr>
+        <p:style>
+          <a:lnRef idx="1">
+            <a:schemeClr val="accent1"/>
+          </a:lnRef>
+          <a:fillRef idx="3">
+            <a:schemeClr val="accent1"/>
+          </a:fillRef>
+          <a:effectRef idx="2">
+            <a:schemeClr val="accent1"/>
+          </a:effectRef>
+          <a:fontRef idx="minor">
+            <a:schemeClr val="lt1"/>
+          </a:fontRef>
+        </p:style>
+        <p:txBody>
+          <a:bodyPr rtlCol="0" anchor="ctr"/>
+          <a:lstStyle/>
+          <a:p>
+            <a:pPr algn="ctr"/>
+            <a:r>
+              <a:rPr sz="800" b="1">
+                <a:solidFill>
+                  <a:srgbClr val="FFFFFF"/>
+                </a:solidFill>
+              </a:rPr>
+              <a:t>High</a:t>
+            </a:r>
+          </a:p>
+        </p:txBody>
+      </p:sp>
+      <p:sp>
+        <p:nvSpPr>
+          <p:cNvPr id="55" name="Rectangle 54"/>
+          <p:cNvSpPr/>
+          <p:nvPr/>
+        </p:nvSpPr>
+        <p:spPr>
+          <a:xfrm>
+            <a:off x="8686800" y="5760720"/>
+            <a:ext cx="1371600" cy="320040"/>
+          </a:xfrm>
+          <a:prstGeom prst="rect">
+            <a:avLst/>
+          </a:prstGeom>
+          <a:solidFill>
+            <a:srgbClr val="EF5350"/>
+          </a:solidFill>
+          <a:ln w="12700">
+            <a:solidFill>
+              <a:srgbClr val="FFFFFF"/>
+            </a:solidFill>
+          </a:ln>
+        </p:spPr>
+        <p:style>
+          <a:lnRef idx="1">
+            <a:schemeClr val="accent1"/>
+          </a:lnRef>
+          <a:fillRef idx="3">
+            <a:schemeClr val="accent1"/>
+          </a:fillRef>
+          <a:effectRef idx="2">
+            <a:schemeClr val="accent1"/>
+          </a:effectRef>
+          <a:fontRef idx="minor">
+            <a:schemeClr val="lt1"/>
+          </a:fontRef>
+        </p:style>
+        <p:txBody>
+          <a:bodyPr rtlCol="0" anchor="ctr"/>
+          <a:lstStyle/>
+          <a:p>
+            <a:pPr algn="ctr"/>
+            <a:r>
+              <a:rPr sz="800" b="1">
+                <a:solidFill>
+                  <a:srgbClr val="FFFFFF"/>
+                </a:solidFill>
+              </a:rPr>
+              <a:t>Very High</a:t>
+            </a:r>
+          </a:p>
+        </p:txBody>
+      </p:sp>
+      <p:sp>
+        <p:nvSpPr>
+          <p:cNvPr id="56" name="TextBox 55"/>
+          <p:cNvSpPr txBox="1"/>
+          <p:nvPr/>
+        </p:nvSpPr>
+        <p:spPr>
+          <a:xfrm>
+            <a:off x="457200" y="6400800"/>
+            <a:ext cx="11247120" cy="365760"/>
+          </a:xfrm>
+          <a:prstGeom prst="rect">
+            <a:avLst/>
+          </a:prstGeom>
+          <a:noFill/>
+        </p:spPr>
+        <p:txBody>
+          <a:bodyPr wrap="square">
+            <a:spAutoFit/>
+          </a:bodyPr>
+          <a:lstStyle/>
+          <a:p>
+            <a:pPr algn="ctr"/>
+            <a:r>
+              <a:rPr sz="1100" i="1">
+                <a:solidFill>
+                  <a:srgbClr val="424242"/>
+                </a:solidFill>
+              </a:rPr>
+              <a:t>Figure 3. Clinical-competition gap risk matrix by disease area and assessment dimension.</a:t>
             </a:r>
           </a:p>
         </p:txBody>
